--- a/exports/pptx/lessons/middle-module-03-ayurveda-good-health/day-01-hook.pptx
+++ b/exports/pptx/lessons/middle-module-03-ayurveda-good-health/day-01-hook.pptx
@@ -16,9 +16,13 @@
     <p:sldId id="264" r:id="rId10"/>
     <p:sldId id="265" r:id="rId11"/>
     <p:sldId id="266" r:id="rId12"/>
+    <p:sldId id="267" r:id="rId13"/>
+    <p:sldId id="268" r:id="rId14"/>
+    <p:sldId id="269" r:id="rId15"/>
+    <p:sldId id="270" r:id="rId16"/>
   </p:sldIdLst>
   <p:notesMasterIdLst>
-    <p:notesMasterId r:id="rId13"/>
+    <p:notesMasterId r:id="rId17"/>
   </p:notesMasterIdLst>
   <p:sldSz cx="9144000" cy="5143500"/>
   <p:notesSz cx="5143500" cy="9144000"/>
@@ -712,6 +716,358 @@
             <a:fld id="{F7021451-1387-4CA6-816F-3879F97B5CBC}" type="slidenum">
               <a:rPr lang="en-US"/>
               <a:t>11</a:t>
+            </a:fld>
+            <a:endParaRPr lang="en-US"/>
+          </a:p>
+        </p:txBody>
+      </p:sp>
+    </p:spTree>
+    <p:extLst>
+      <p:ext uri="{BB962C8B-B14F-4D97-AF65-F5344CB8AC3E}">
+        <p14:creationId xmlns:p14="http://schemas.microsoft.com/office/powerpoint/2010/main" val="1024086991"/>
+      </p:ext>
+    </p:extLst>
+  </p:cSld>
+  <p:clrMapOvr>
+    <a:masterClrMapping/>
+  </p:clrMapOvr>
+</p:notes>
+</file>
+
+<file path=ppt/notesSlides/notesSlide12.xml><?xml version="1.0" encoding="utf-8"?>
+<p:notes xmlns:a="http://schemas.openxmlformats.org/drawingml/2006/main" xmlns:r="http://schemas.openxmlformats.org/officeDocument/2006/relationships" xmlns:p="http://schemas.openxmlformats.org/presentationml/2006/main">
+  <p:cSld>
+    <p:spTree>
+      <p:nvGrpSpPr>
+        <p:cNvPr id="1" name=""/>
+        <p:cNvGrpSpPr/>
+        <p:nvPr/>
+      </p:nvGrpSpPr>
+      <p:grpSpPr>
+        <a:xfrm>
+          <a:off x="0" y="0"/>
+          <a:ext cx="0" cy="0"/>
+          <a:chOff x="0" y="0"/>
+          <a:chExt cx="0" cy="0"/>
+        </a:xfrm>
+      </p:grpSpPr>
+      <p:sp>
+        <p:nvSpPr>
+          <p:cNvPr id="2" name="Slide Image Placeholder 1"/>
+          <p:cNvSpPr>
+            <a:spLocks noGrp="1" noRot="1" noChangeAspect="1"/>
+          </p:cNvSpPr>
+          <p:nvPr>
+            <p:ph type="sldImg"/>
+          </p:nvPr>
+        </p:nvSpPr>
+        <p:spPr/>
+      </p:sp>
+      <p:sp>
+        <p:nvSpPr>
+          <p:cNvPr id="3" name="Notes Placeholder 2"/>
+          <p:cNvSpPr>
+            <a:spLocks noGrp="1"/>
+          </p:cNvSpPr>
+          <p:nvPr>
+            <p:ph type="body" idx="1"/>
+          </p:nvPr>
+        </p:nvSpPr>
+        <p:spPr/>
+        <p:txBody>
+          <a:bodyPr/>
+          <a:lstStyle/>
+          <a:p>
+            <a:r>
+              <a:rPr lang="en-US" dirty="0"/>
+              <a:t/>
+            </a:r>
+            <a:endParaRPr lang="en-US" dirty="0"/>
+          </a:p>
+        </p:txBody>
+      </p:sp>
+      <p:sp>
+        <p:nvSpPr>
+          <p:cNvPr id="4" name="Slide Number Placeholder 3"/>
+          <p:cNvSpPr>
+            <a:spLocks noGrp="1"/>
+          </p:cNvSpPr>
+          <p:nvPr>
+            <p:ph type="sldNum" sz="quarter" idx="10"/>
+          </p:nvPr>
+        </p:nvSpPr>
+        <p:spPr/>
+        <p:txBody>
+          <a:bodyPr/>
+          <a:lstStyle/>
+          <a:p>
+            <a:fld id="{F7021451-1387-4CA6-816F-3879F97B5CBC}" type="slidenum">
+              <a:rPr lang="en-US"/>
+              <a:t>12</a:t>
+            </a:fld>
+            <a:endParaRPr lang="en-US"/>
+          </a:p>
+        </p:txBody>
+      </p:sp>
+    </p:spTree>
+    <p:extLst>
+      <p:ext uri="{BB962C8B-B14F-4D97-AF65-F5344CB8AC3E}">
+        <p14:creationId xmlns:p14="http://schemas.microsoft.com/office/powerpoint/2010/main" val="1024086991"/>
+      </p:ext>
+    </p:extLst>
+  </p:cSld>
+  <p:clrMapOvr>
+    <a:masterClrMapping/>
+  </p:clrMapOvr>
+</p:notes>
+</file>
+
+<file path=ppt/notesSlides/notesSlide13.xml><?xml version="1.0" encoding="utf-8"?>
+<p:notes xmlns:a="http://schemas.openxmlformats.org/drawingml/2006/main" xmlns:r="http://schemas.openxmlformats.org/officeDocument/2006/relationships" xmlns:p="http://schemas.openxmlformats.org/presentationml/2006/main">
+  <p:cSld>
+    <p:spTree>
+      <p:nvGrpSpPr>
+        <p:cNvPr id="1" name=""/>
+        <p:cNvGrpSpPr/>
+        <p:nvPr/>
+      </p:nvGrpSpPr>
+      <p:grpSpPr>
+        <a:xfrm>
+          <a:off x="0" y="0"/>
+          <a:ext cx="0" cy="0"/>
+          <a:chOff x="0" y="0"/>
+          <a:chExt cx="0" cy="0"/>
+        </a:xfrm>
+      </p:grpSpPr>
+      <p:sp>
+        <p:nvSpPr>
+          <p:cNvPr id="2" name="Slide Image Placeholder 1"/>
+          <p:cNvSpPr>
+            <a:spLocks noGrp="1" noRot="1" noChangeAspect="1"/>
+          </p:cNvSpPr>
+          <p:nvPr>
+            <p:ph type="sldImg"/>
+          </p:nvPr>
+        </p:nvSpPr>
+        <p:spPr/>
+      </p:sp>
+      <p:sp>
+        <p:nvSpPr>
+          <p:cNvPr id="3" name="Notes Placeholder 2"/>
+          <p:cNvSpPr>
+            <a:spLocks noGrp="1"/>
+          </p:cNvSpPr>
+          <p:nvPr>
+            <p:ph type="body" idx="1"/>
+          </p:nvPr>
+        </p:nvSpPr>
+        <p:spPr/>
+        <p:txBody>
+          <a:bodyPr/>
+          <a:lstStyle/>
+          <a:p>
+            <a:r>
+              <a:rPr lang="en-US" dirty="0"/>
+              <a:t/>
+            </a:r>
+            <a:endParaRPr lang="en-US" dirty="0"/>
+          </a:p>
+        </p:txBody>
+      </p:sp>
+      <p:sp>
+        <p:nvSpPr>
+          <p:cNvPr id="4" name="Slide Number Placeholder 3"/>
+          <p:cNvSpPr>
+            <a:spLocks noGrp="1"/>
+          </p:cNvSpPr>
+          <p:nvPr>
+            <p:ph type="sldNum" sz="quarter" idx="10"/>
+          </p:nvPr>
+        </p:nvSpPr>
+        <p:spPr/>
+        <p:txBody>
+          <a:bodyPr/>
+          <a:lstStyle/>
+          <a:p>
+            <a:fld id="{F7021451-1387-4CA6-816F-3879F97B5CBC}" type="slidenum">
+              <a:rPr lang="en-US"/>
+              <a:t>13</a:t>
+            </a:fld>
+            <a:endParaRPr lang="en-US"/>
+          </a:p>
+        </p:txBody>
+      </p:sp>
+    </p:spTree>
+    <p:extLst>
+      <p:ext uri="{BB962C8B-B14F-4D97-AF65-F5344CB8AC3E}">
+        <p14:creationId xmlns:p14="http://schemas.microsoft.com/office/powerpoint/2010/main" val="1024086991"/>
+      </p:ext>
+    </p:extLst>
+  </p:cSld>
+  <p:clrMapOvr>
+    <a:masterClrMapping/>
+  </p:clrMapOvr>
+</p:notes>
+</file>
+
+<file path=ppt/notesSlides/notesSlide14.xml><?xml version="1.0" encoding="utf-8"?>
+<p:notes xmlns:a="http://schemas.openxmlformats.org/drawingml/2006/main" xmlns:r="http://schemas.openxmlformats.org/officeDocument/2006/relationships" xmlns:p="http://schemas.openxmlformats.org/presentationml/2006/main">
+  <p:cSld>
+    <p:spTree>
+      <p:nvGrpSpPr>
+        <p:cNvPr id="1" name=""/>
+        <p:cNvGrpSpPr/>
+        <p:nvPr/>
+      </p:nvGrpSpPr>
+      <p:grpSpPr>
+        <a:xfrm>
+          <a:off x="0" y="0"/>
+          <a:ext cx="0" cy="0"/>
+          <a:chOff x="0" y="0"/>
+          <a:chExt cx="0" cy="0"/>
+        </a:xfrm>
+      </p:grpSpPr>
+      <p:sp>
+        <p:nvSpPr>
+          <p:cNvPr id="2" name="Slide Image Placeholder 1"/>
+          <p:cNvSpPr>
+            <a:spLocks noGrp="1" noRot="1" noChangeAspect="1"/>
+          </p:cNvSpPr>
+          <p:nvPr>
+            <p:ph type="sldImg"/>
+          </p:nvPr>
+        </p:nvSpPr>
+        <p:spPr/>
+      </p:sp>
+      <p:sp>
+        <p:nvSpPr>
+          <p:cNvPr id="3" name="Notes Placeholder 2"/>
+          <p:cNvSpPr>
+            <a:spLocks noGrp="1"/>
+          </p:cNvSpPr>
+          <p:nvPr>
+            <p:ph type="body" idx="1"/>
+          </p:nvPr>
+        </p:nvSpPr>
+        <p:spPr/>
+        <p:txBody>
+          <a:bodyPr/>
+          <a:lstStyle/>
+          <a:p>
+            <a:r>
+              <a:rPr lang="en-US" dirty="0"/>
+              <a:t/>
+            </a:r>
+            <a:endParaRPr lang="en-US" dirty="0"/>
+          </a:p>
+        </p:txBody>
+      </p:sp>
+      <p:sp>
+        <p:nvSpPr>
+          <p:cNvPr id="4" name="Slide Number Placeholder 3"/>
+          <p:cNvSpPr>
+            <a:spLocks noGrp="1"/>
+          </p:cNvSpPr>
+          <p:nvPr>
+            <p:ph type="sldNum" sz="quarter" idx="10"/>
+          </p:nvPr>
+        </p:nvSpPr>
+        <p:spPr/>
+        <p:txBody>
+          <a:bodyPr/>
+          <a:lstStyle/>
+          <a:p>
+            <a:fld id="{F7021451-1387-4CA6-816F-3879F97B5CBC}" type="slidenum">
+              <a:rPr lang="en-US"/>
+              <a:t>14</a:t>
+            </a:fld>
+            <a:endParaRPr lang="en-US"/>
+          </a:p>
+        </p:txBody>
+      </p:sp>
+    </p:spTree>
+    <p:extLst>
+      <p:ext uri="{BB962C8B-B14F-4D97-AF65-F5344CB8AC3E}">
+        <p14:creationId xmlns:p14="http://schemas.microsoft.com/office/powerpoint/2010/main" val="1024086991"/>
+      </p:ext>
+    </p:extLst>
+  </p:cSld>
+  <p:clrMapOvr>
+    <a:masterClrMapping/>
+  </p:clrMapOvr>
+</p:notes>
+</file>
+
+<file path=ppt/notesSlides/notesSlide15.xml><?xml version="1.0" encoding="utf-8"?>
+<p:notes xmlns:a="http://schemas.openxmlformats.org/drawingml/2006/main" xmlns:r="http://schemas.openxmlformats.org/officeDocument/2006/relationships" xmlns:p="http://schemas.openxmlformats.org/presentationml/2006/main">
+  <p:cSld>
+    <p:spTree>
+      <p:nvGrpSpPr>
+        <p:cNvPr id="1" name=""/>
+        <p:cNvGrpSpPr/>
+        <p:nvPr/>
+      </p:nvGrpSpPr>
+      <p:grpSpPr>
+        <a:xfrm>
+          <a:off x="0" y="0"/>
+          <a:ext cx="0" cy="0"/>
+          <a:chOff x="0" y="0"/>
+          <a:chExt cx="0" cy="0"/>
+        </a:xfrm>
+      </p:grpSpPr>
+      <p:sp>
+        <p:nvSpPr>
+          <p:cNvPr id="2" name="Slide Image Placeholder 1"/>
+          <p:cNvSpPr>
+            <a:spLocks noGrp="1" noRot="1" noChangeAspect="1"/>
+          </p:cNvSpPr>
+          <p:nvPr>
+            <p:ph type="sldImg"/>
+          </p:nvPr>
+        </p:nvSpPr>
+        <p:spPr/>
+      </p:sp>
+      <p:sp>
+        <p:nvSpPr>
+          <p:cNvPr id="3" name="Notes Placeholder 2"/>
+          <p:cNvSpPr>
+            <a:spLocks noGrp="1"/>
+          </p:cNvSpPr>
+          <p:nvPr>
+            <p:ph type="body" idx="1"/>
+          </p:nvPr>
+        </p:nvSpPr>
+        <p:spPr/>
+        <p:txBody>
+          <a:bodyPr/>
+          <a:lstStyle/>
+          <a:p>
+            <a:r>
+              <a:rPr lang="en-US" dirty="0"/>
+              <a:t/>
+            </a:r>
+            <a:endParaRPr lang="en-US" dirty="0"/>
+          </a:p>
+        </p:txBody>
+      </p:sp>
+      <p:sp>
+        <p:nvSpPr>
+          <p:cNvPr id="4" name="Slide Number Placeholder 3"/>
+          <p:cNvSpPr>
+            <a:spLocks noGrp="1"/>
+          </p:cNvSpPr>
+          <p:nvPr>
+            <p:ph type="sldNum" sz="quarter" idx="10"/>
+          </p:nvPr>
+        </p:nvSpPr>
+        <p:spPr/>
+        <p:txBody>
+          <a:bodyPr/>
+          <a:lstStyle/>
+          <a:p>
+            <a:fld id="{F7021451-1387-4CA6-816F-3879F97B5CBC}" type="slidenum">
+              <a:rPr lang="en-US"/>
+              <a:t>15</a:t>
             </a:fld>
             <a:endParaRPr lang="en-US"/>
           </a:p>
@@ -1965,194 +2321,6 @@
         </p:nvSpPr>
         <p:spPr>
           <a:xfrm>
-            <a:off x="406301" y="1223963"/>
-            <a:ext cx="8498026" cy="274290"/>
-          </a:xfrm>
-          <a:prstGeom prst="rect">
-            <a:avLst/>
-          </a:prstGeom>
-          <a:noFill/>
-          <a:ln/>
-        </p:spPr>
-        <p:txBody>
-          <a:bodyPr wrap="square" lIns="0" tIns="0" rIns="0" bIns="0" rtlCol="0" anchor="t"/>
-          <a:lstStyle/>
-          <a:p>
-            <a:pPr algn="l" indent="0" marL="0">
-              <a:lnSpc>
-                <a:spcPts val="2160"/>
-              </a:lnSpc>
-              <a:spcBef>
-                <a:spcPts val="600"/>
-              </a:spcBef>
-              <a:spcAft>
-                <a:spcPts val="800"/>
-              </a:spcAft>
-              <a:buNone/>
-            </a:pPr>
-            <a:r>
-              <a:rPr lang="en-US" sz="1800" b="1" dirty="0">
-                <a:solidFill>
-                  <a:srgbClr val="FE4447"/>
-                </a:solidFill>
-                <a:latin typeface="Georgia" pitchFamily="34" charset="0"/>
-                <a:ea typeface="Georgia" pitchFamily="34" charset="-122"/>
-                <a:cs typeface="Georgia" pitchFamily="34" charset="-120"/>
-              </a:rPr>
-              <a:t>Learning objective</a:t>
-            </a:r>
-            <a:endParaRPr lang="en-US" sz="1800" dirty="0"/>
-          </a:p>
-        </p:txBody>
-      </p:sp>
-      <p:sp>
-        <p:nvSpPr>
-          <p:cNvPr id="6" name="Text 4"/>
-          <p:cNvSpPr/>
-          <p:nvPr/>
-        </p:nvSpPr>
-        <p:spPr>
-          <a:xfrm>
-            <a:off x="406301" y="1637854"/>
-            <a:ext cx="8498026" cy="426541"/>
-          </a:xfrm>
-          <a:prstGeom prst="rect">
-            <a:avLst/>
-          </a:prstGeom>
-          <a:noFill/>
-          <a:ln/>
-        </p:spPr>
-        <p:txBody>
-          <a:bodyPr wrap="square" lIns="0" tIns="0" rIns="0" bIns="0" rtlCol="0" anchor="t"/>
-          <a:lstStyle/>
-          <a:p>
-            <a:pPr algn="l" indent="0" marL="0">
-              <a:lnSpc>
-                <a:spcPts val="1680"/>
-              </a:lnSpc>
-              <a:spcBef>
-                <a:spcPts val="300"/>
-              </a:spcBef>
-              <a:spcAft>
-                <a:spcPts val="300"/>
-              </a:spcAft>
-              <a:buNone/>
-            </a:pPr>
-            <a:r>
-              <a:rPr lang="en-US" sz="1200" dirty="0">
-                <a:solidFill>
-                  <a:srgbClr val="1C2833"/>
-                </a:solidFill>
-                <a:latin typeface="Arial" pitchFamily="34" charset="0"/>
-                <a:ea typeface="Arial" pitchFamily="34" charset="-122"/>
-                <a:cs typeface="Arial" pitchFamily="34" charset="-120"/>
-              </a:rPr>
-              <a:t>Students define </a:t>
-            </a:r>
-            <a:pPr algn="l" indent="0" marL="0">
-              <a:lnSpc>
-                <a:spcPts val="1680"/>
-              </a:lnSpc>
-              <a:spcBef>
-                <a:spcPts val="300"/>
-              </a:spcBef>
-              <a:spcAft>
-                <a:spcPts val="300"/>
-              </a:spcAft>
-              <a:buNone/>
-            </a:pPr>
-            <a:r>
-              <a:rPr lang="en-US" sz="1200" i="1" dirty="0">
-                <a:solidFill>
-                  <a:srgbClr val="1C2833"/>
-                </a:solidFill>
-                <a:latin typeface="Arial" pitchFamily="34" charset="0"/>
-                <a:ea typeface="Arial" pitchFamily="34" charset="-122"/>
-                <a:cs typeface="Arial" pitchFamily="34" charset="-120"/>
-              </a:rPr>
-              <a:t>Āyurveda</a:t>
-            </a:r>
-            <a:pPr algn="l" indent="0" marL="0">
-              <a:lnSpc>
-                <a:spcPts val="1680"/>
-              </a:lnSpc>
-              <a:spcBef>
-                <a:spcPts val="300"/>
-              </a:spcBef>
-              <a:spcAft>
-                <a:spcPts val="300"/>
-              </a:spcAft>
-              <a:buNone/>
-            </a:pPr>
-            <a:r>
-              <a:rPr lang="en-US" sz="1200" dirty="0">
-                <a:solidFill>
-                  <a:srgbClr val="1C2833"/>
-                </a:solidFill>
-                <a:latin typeface="Arial" pitchFamily="34" charset="0"/>
-                <a:ea typeface="Arial" pitchFamily="34" charset="-122"/>
-                <a:cs typeface="Arial" pitchFamily="34" charset="-120"/>
-              </a:rPr>
-              <a:t> and </a:t>
-            </a:r>
-            <a:pPr algn="l" indent="0" marL="0">
-              <a:lnSpc>
-                <a:spcPts val="1680"/>
-              </a:lnSpc>
-              <a:spcBef>
-                <a:spcPts val="300"/>
-              </a:spcBef>
-              <a:spcAft>
-                <a:spcPts val="300"/>
-              </a:spcAft>
-              <a:buNone/>
-            </a:pPr>
-            <a:r>
-              <a:rPr lang="en-US" sz="1200" i="1" dirty="0">
-                <a:solidFill>
-                  <a:srgbClr val="1C2833"/>
-                </a:solidFill>
-                <a:latin typeface="Arial" pitchFamily="34" charset="0"/>
-                <a:ea typeface="Arial" pitchFamily="34" charset="-122"/>
-                <a:cs typeface="Arial" pitchFamily="34" charset="-120"/>
-              </a:rPr>
-              <a:t>Swasthya</a:t>
-            </a:r>
-            <a:pPr algn="l" indent="0" marL="0">
-              <a:lnSpc>
-                <a:spcPts val="1680"/>
-              </a:lnSpc>
-              <a:spcBef>
-                <a:spcPts val="300"/>
-              </a:spcBef>
-              <a:spcAft>
-                <a:spcPts val="300"/>
-              </a:spcAft>
-              <a:buNone/>
-            </a:pPr>
-            <a:r>
-              <a:rPr lang="en-US" sz="1200" dirty="0">
-                <a:solidFill>
-                  <a:srgbClr val="1C2833"/>
-                </a:solidFill>
-                <a:latin typeface="Arial" pitchFamily="34" charset="0"/>
-                <a:ea typeface="Arial" pitchFamily="34" charset="-122"/>
-                <a:cs typeface="Arial" pitchFamily="34" charset="-120"/>
-              </a:rPr>
-              <a:t> and articulate the scope of the framework (lifestyle, prevention, herbal medicine — not surgery or acute care).</a:t>
-            </a:r>
-            <a:endParaRPr lang="en-US" sz="1200" dirty="0"/>
-          </a:p>
-        </p:txBody>
-      </p:sp>
-      <p:sp>
-        <p:nvSpPr>
-          <p:cNvPr id="7" name="Text 5"/>
-          <p:cNvSpPr/>
-          <p:nvPr/>
-        </p:nvSpPr>
-        <p:spPr>
-          <a:xfrm>
             <a:off x="406301" y="4434929"/>
             <a:ext cx="8498026" cy="213271"/>
           </a:xfrm>
@@ -2297,7 +2465,7 @@
                 <a:ea typeface="Georgia" pitchFamily="34" charset="-122"/>
                 <a:cs typeface="Georgia" pitchFamily="34" charset="-120"/>
               </a:rPr>
-              <a:t>Teacher notes</a:t>
+              <a:t>Activity (10 min) — Map a day</a:t>
             </a:r>
             <a:endParaRPr lang="en-US" sz="1800" dirty="0"/>
           </a:p>
@@ -2312,7 +2480,7 @@
         <p:spPr>
           <a:xfrm>
             <a:off x="406301" y="870942"/>
-            <a:ext cx="8498026" cy="426541"/>
+            <a:ext cx="8498026" cy="213271"/>
           </a:xfrm>
           <a:prstGeom prst="rect">
             <a:avLst/>
@@ -2345,7 +2513,53 @@
                 <a:ea typeface="Arial" pitchFamily="34" charset="-122"/>
                 <a:cs typeface="Arial" pitchFamily="34" charset="-120"/>
               </a:rPr>
-              <a:t>– The "8 branches" detail is for students who want depth. At Middle band, the 6 mentioned items are enough. – Watch for students with health conditions — don't single them out or imply Ayurveda is for them.</a:t>
+              <a:t>Students fold paper in 4. Label each quadrant: </a:t>
+            </a:r>
+            <a:pPr algn="l" indent="0" marL="0">
+              <a:lnSpc>
+                <a:spcPts val="1680"/>
+              </a:lnSpc>
+              <a:spcBef>
+                <a:spcPts val="300"/>
+              </a:spcBef>
+              <a:spcAft>
+                <a:spcPts val="300"/>
+              </a:spcAft>
+              <a:buNone/>
+            </a:pPr>
+            <a:r>
+              <a:rPr lang="en-US" sz="1200" i="1" dirty="0">
+                <a:solidFill>
+                  <a:srgbClr val="1C2833"/>
+                </a:solidFill>
+                <a:latin typeface="Arial" pitchFamily="34" charset="0"/>
+                <a:ea typeface="Arial" pitchFamily="34" charset="-122"/>
+                <a:cs typeface="Arial" pitchFamily="34" charset="-120"/>
+              </a:rPr>
+              <a:t>Sleep, Food, Exercise, Mood</a:t>
+            </a:r>
+            <a:pPr algn="l" indent="0" marL="0">
+              <a:lnSpc>
+                <a:spcPts val="1680"/>
+              </a:lnSpc>
+              <a:spcBef>
+                <a:spcPts val="300"/>
+              </a:spcBef>
+              <a:spcAft>
+                <a:spcPts val="300"/>
+              </a:spcAft>
+              <a:buNone/>
+            </a:pPr>
+            <a:r>
+              <a:rPr lang="en-US" sz="1200" dirty="0">
+                <a:solidFill>
+                  <a:srgbClr val="1C2833"/>
+                </a:solidFill>
+                <a:latin typeface="Arial" pitchFamily="34" charset="0"/>
+                <a:ea typeface="Arial" pitchFamily="34" charset="-122"/>
+                <a:cs typeface="Arial" pitchFamily="34" charset="-120"/>
+              </a:rPr>
+              <a:t>. In each, write what they did yesterday.</a:t>
             </a:r>
             <a:endParaRPr lang="en-US" sz="1200" dirty="0"/>
           </a:p>
@@ -2354,6 +2568,77 @@
       <p:sp>
         <p:nvSpPr>
           <p:cNvPr id="5" name="Text 3"/>
+          <p:cNvSpPr/>
+          <p:nvPr/>
+        </p:nvSpPr>
+        <p:spPr>
+          <a:xfrm>
+            <a:off x="406301" y="1160413"/>
+            <a:ext cx="8498026" cy="213271"/>
+          </a:xfrm>
+          <a:prstGeom prst="rect">
+            <a:avLst/>
+          </a:prstGeom>
+          <a:noFill/>
+          <a:ln/>
+        </p:spPr>
+        <p:txBody>
+          <a:bodyPr wrap="square" lIns="0" tIns="0" rIns="0" bIns="0" rtlCol="0" anchor="t"/>
+          <a:lstStyle/>
+          <a:p>
+            <a:pPr algn="l" indent="0" marL="0">
+              <a:lnSpc>
+                <a:spcPts val="1680"/>
+              </a:lnSpc>
+              <a:spcBef>
+                <a:spcPts val="300"/>
+              </a:spcBef>
+              <a:spcAft>
+                <a:spcPts val="300"/>
+              </a:spcAft>
+              <a:buNone/>
+            </a:pPr>
+            <a:r>
+              <a:rPr lang="en-US" sz="1200" dirty="0">
+                <a:solidFill>
+                  <a:srgbClr val="1C2833"/>
+                </a:solidFill>
+                <a:latin typeface="Arial" pitchFamily="34" charset="0"/>
+                <a:ea typeface="Arial" pitchFamily="34" charset="-122"/>
+                <a:cs typeface="Arial" pitchFamily="34" charset="-120"/>
+              </a:rPr>
+              <a:t>Note: </a:t>
+            </a:r>
+            <a:pPr algn="l" indent="0" marL="0">
+              <a:lnSpc>
+                <a:spcPts val="1680"/>
+              </a:lnSpc>
+              <a:spcBef>
+                <a:spcPts val="300"/>
+              </a:spcBef>
+              <a:spcAft>
+                <a:spcPts val="300"/>
+              </a:spcAft>
+              <a:buNone/>
+            </a:pPr>
+            <a:r>
+              <a:rPr lang="en-US" sz="1200" i="1" dirty="0">
+                <a:solidFill>
+                  <a:srgbClr val="1C2833"/>
+                </a:solidFill>
+                <a:latin typeface="Arial" pitchFamily="34" charset="0"/>
+                <a:ea typeface="Arial" pitchFamily="34" charset="-122"/>
+                <a:cs typeface="Arial" pitchFamily="34" charset="-120"/>
+              </a:rPr>
+              <a:t>"This is your raw data. Over the next 2 weeks we'll learn the Ayurvedic framework to make sense of it."</a:t>
+            </a:r>
+            <a:endParaRPr lang="en-US" sz="1200" dirty="0"/>
+          </a:p>
+        </p:txBody>
+      </p:sp>
+      <p:sp>
+        <p:nvSpPr>
+          <p:cNvPr id="6" name="Text 4"/>
           <p:cNvSpPr/>
           <p:nvPr/>
         </p:nvSpPr>
@@ -2503,7 +2788,7 @@
                 <a:ea typeface="Georgia" pitchFamily="34" charset="-122"/>
                 <a:cs typeface="Georgia" pitchFamily="34" charset="-120"/>
               </a:rPr>
-              <a:t>Citation(s) used</a:t>
+              <a:t>Wrap-up (5 min)</a:t>
             </a:r>
             <a:endParaRPr lang="en-US" sz="1800" dirty="0"/>
           </a:p>
@@ -2518,7 +2803,7 @@
         <p:spPr>
           <a:xfrm>
             <a:off x="634901" y="883593"/>
-            <a:ext cx="8102798" cy="300930"/>
+            <a:ext cx="8102798" cy="281880"/>
           </a:xfrm>
           <a:prstGeom prst="rect">
             <a:avLst/>
@@ -2549,7 +2834,7 @@
                 <a:ea typeface="Arial" pitchFamily="34" charset="-122"/>
                 <a:cs typeface="Arial" pitchFamily="34" charset="-120"/>
               </a:rPr>
-              <a:t>vidya-karana RAG cache </a:t>
+              <a:t>Preview Day 2: </a:t>
             </a:r>
             <a:pPr algn="l" indent="0" marL="0">
               <a:lnSpc>
@@ -2561,35 +2846,15 @@
               <a:buNone/>
             </a:pPr>
             <a:r>
-              <a:rPr lang="en-US" sz="1200" dirty="0">
-                <a:solidFill>
-                  <a:srgbClr val="1C2833"/>
-                </a:solidFill>
-                <a:latin typeface="Arial" pitchFamily="34" charset="0"/>
-                <a:ea typeface="Arial" pitchFamily="34" charset="-122"/>
-                <a:cs typeface="Arial" pitchFamily="34" charset="-120"/>
-              </a:rPr>
-              <a:t>day-01-intro.json</a:t>
-            </a:r>
-            <a:pPr algn="l" indent="0" marL="0">
-              <a:lnSpc>
-                <a:spcPts val="1620"/>
-              </a:lnSpc>
-              <a:spcAft>
-                <a:spcPts val="300"/>
-              </a:spcAft>
-              <a:buNone/>
-            </a:pPr>
-            <a:r>
-              <a:rPr lang="en-US" sz="1200" dirty="0">
-                <a:solidFill>
-                  <a:srgbClr val="1C2833"/>
-                </a:solidFill>
-                <a:latin typeface="Arial" pitchFamily="34" charset="0"/>
-                <a:ea typeface="Arial" pitchFamily="34" charset="-122"/>
-                <a:cs typeface="Arial" pitchFamily="34" charset="-120"/>
-              </a:rPr>
-              <a:t> for general Ayurveda framing.</a:t>
+              <a:rPr lang="en-US" sz="1200" i="1" dirty="0">
+                <a:solidFill>
+                  <a:srgbClr val="1C2833"/>
+                </a:solidFill>
+                <a:latin typeface="Arial" pitchFamily="34" charset="0"/>
+                <a:ea typeface="Arial" pitchFamily="34" charset="-122"/>
+                <a:cs typeface="Arial" pitchFamily="34" charset="-120"/>
+              </a:rPr>
+              <a:t>"Tomorrow — the Tridosha. Three biological energies."</a:t>
             </a:r>
             <a:endParaRPr lang="en-US" sz="1200" dirty="0"/>
           </a:p>
@@ -2603,7 +2868,7 @@
         </p:nvSpPr>
         <p:spPr>
           <a:xfrm>
-            <a:off x="406301" y="1273373"/>
+            <a:off x="406301" y="4434929"/>
             <a:ext cx="8498026" cy="213271"/>
           </a:xfrm>
           <a:prstGeom prst="rect">
@@ -2637,15 +2902,1015 @@
                 <a:ea typeface="Arial" pitchFamily="34" charset="-122"/>
                 <a:cs typeface="Arial" pitchFamily="34" charset="-120"/>
               </a:rPr>
-              <a:t>– Wujastyk (2003) for scope.</a:t>
+              <a:t>Middle ·  · IKS Curriculum</a:t>
             </a:r>
             <a:endParaRPr lang="en-US" sz="1200" dirty="0"/>
           </a:p>
         </p:txBody>
       </p:sp>
-      <p:sp>
-        <p:nvSpPr>
-          <p:cNvPr id="6" name="Text 4"/>
+    </p:spTree>
+  </p:cSld>
+  <p:clrMapOvr>
+    <a:masterClrMapping/>
+  </p:clrMapOvr>
+</p:sld>
+</file>
+
+<file path=ppt/slides/slide12.xml><?xml version="1.0" encoding="utf-8"?>
+<p:sld xmlns:a="http://schemas.openxmlformats.org/drawingml/2006/main" xmlns:r="http://schemas.openxmlformats.org/officeDocument/2006/relationships" xmlns:p="http://schemas.openxmlformats.org/presentationml/2006/main">
+  <p:cSld name="Slide 12">
+    <p:bg>
+      <p:bgPr>
+        <a:solidFill>
+          <a:srgbClr val="FFFFFF"/>
+        </a:solidFill>
+      </p:bgPr>
+    </p:bg>
+    <p:spTree>
+      <p:nvGrpSpPr>
+        <p:cNvPr id="1" name=""/>
+        <p:cNvGrpSpPr/>
+        <p:nvPr/>
+      </p:nvGrpSpPr>
+      <p:grpSpPr>
+        <a:xfrm>
+          <a:off x="0" y="0"/>
+          <a:ext cx="0" cy="0"/>
+          <a:chOff x="0" y="0"/>
+          <a:chExt cx="0" cy="0"/>
+        </a:xfrm>
+      </p:grpSpPr>
+      <p:sp>
+        <p:nvSpPr>
+          <p:cNvPr id="2" name="Text 0"/>
+          <p:cNvSpPr/>
+          <p:nvPr/>
+        </p:nvSpPr>
+        <p:spPr>
+          <a:xfrm>
+            <a:off x="0" y="0"/>
+            <a:ext cx="9144000" cy="101501"/>
+          </a:xfrm>
+          <a:prstGeom prst="rect">
+            <a:avLst/>
+          </a:prstGeom>
+          <a:solidFill>
+            <a:srgbClr val="277884"/>
+          </a:solidFill>
+          <a:ln/>
+        </p:spPr>
+        <p:txBody>
+          <a:bodyPr wrap="square" rtlCol="0" anchor="ctr"/>
+          <a:lstStyle/>
+          <a:p>
+            <a:pPr indent="0" marL="0">
+              <a:buNone/>
+            </a:pPr>
+            <a:endParaRPr lang="en-US" dirty="0"/>
+          </a:p>
+        </p:txBody>
+      </p:sp>
+      <p:sp>
+        <p:nvSpPr>
+          <p:cNvPr id="3" name="Text 1"/>
+          <p:cNvSpPr/>
+          <p:nvPr/>
+        </p:nvSpPr>
+        <p:spPr>
+          <a:xfrm>
+            <a:off x="406301" y="457051"/>
+            <a:ext cx="8498026" cy="274290"/>
+          </a:xfrm>
+          <a:prstGeom prst="rect">
+            <a:avLst/>
+          </a:prstGeom>
+          <a:noFill/>
+          <a:ln/>
+        </p:spPr>
+        <p:txBody>
+          <a:bodyPr wrap="square" lIns="0" tIns="0" rIns="0" bIns="0" rtlCol="0" anchor="t"/>
+          <a:lstStyle/>
+          <a:p>
+            <a:pPr algn="l" indent="0" marL="0">
+              <a:lnSpc>
+                <a:spcPts val="2160"/>
+              </a:lnSpc>
+              <a:spcBef>
+                <a:spcPts val="600"/>
+              </a:spcBef>
+              <a:spcAft>
+                <a:spcPts val="800"/>
+              </a:spcAft>
+              <a:buNone/>
+            </a:pPr>
+            <a:r>
+              <a:rPr lang="en-US" sz="1800" b="1" dirty="0">
+                <a:solidFill>
+                  <a:srgbClr val="FE4447"/>
+                </a:solidFill>
+                <a:latin typeface="Georgia" pitchFamily="34" charset="0"/>
+                <a:ea typeface="Georgia" pitchFamily="34" charset="-122"/>
+                <a:cs typeface="Georgia" pitchFamily="34" charset="-120"/>
+              </a:rPr>
+              <a:t>Homework</a:t>
+            </a:r>
+            <a:endParaRPr lang="en-US" sz="1800" dirty="0"/>
+          </a:p>
+        </p:txBody>
+      </p:sp>
+      <p:sp>
+        <p:nvSpPr>
+          <p:cNvPr id="4" name="Text 2"/>
+          <p:cNvSpPr/>
+          <p:nvPr/>
+        </p:nvSpPr>
+        <p:spPr>
+          <a:xfrm>
+            <a:off x="634901" y="883593"/>
+            <a:ext cx="8102798" cy="281880"/>
+          </a:xfrm>
+          <a:prstGeom prst="rect">
+            <a:avLst/>
+          </a:prstGeom>
+          <a:noFill/>
+          <a:ln/>
+        </p:spPr>
+        <p:txBody>
+          <a:bodyPr wrap="square" lIns="0" tIns="0" rIns="0" bIns="0" rtlCol="0" anchor="t"/>
+          <a:lstStyle/>
+          <a:p>
+            <a:pPr algn="l" marL="342900" indent="-342900">
+              <a:lnSpc>
+                <a:spcPts val="1620"/>
+              </a:lnSpc>
+              <a:spcAft>
+                <a:spcPts val="300"/>
+              </a:spcAft>
+              <a:buSzPct val="100000"/>
+              <a:buChar char="•"/>
+            </a:pPr>
+            <a:r>
+              <a:rPr lang="en-US" sz="1200" dirty="0">
+                <a:solidFill>
+                  <a:srgbClr val="1C2833"/>
+                </a:solidFill>
+                <a:latin typeface="Arial" pitchFamily="34" charset="0"/>
+                <a:ea typeface="Arial" pitchFamily="34" charset="-122"/>
+                <a:cs typeface="Arial" pitchFamily="34" charset="-120"/>
+              </a:rPr>
+              <a:t>Notice tonight: what time do you go to sleep? What did you eat for dinner? How did you feel after?</a:t>
+            </a:r>
+            <a:endParaRPr lang="en-US" sz="1200" dirty="0"/>
+          </a:p>
+        </p:txBody>
+      </p:sp>
+      <p:sp>
+        <p:nvSpPr>
+          <p:cNvPr id="5" name="Text 3"/>
+          <p:cNvSpPr/>
+          <p:nvPr/>
+        </p:nvSpPr>
+        <p:spPr>
+          <a:xfrm>
+            <a:off x="406301" y="4434929"/>
+            <a:ext cx="8498026" cy="213271"/>
+          </a:xfrm>
+          <a:prstGeom prst="rect">
+            <a:avLst/>
+          </a:prstGeom>
+          <a:noFill/>
+          <a:ln/>
+        </p:spPr>
+        <p:txBody>
+          <a:bodyPr wrap="square" lIns="0" tIns="0" rIns="0" bIns="0" rtlCol="0" anchor="t"/>
+          <a:lstStyle/>
+          <a:p>
+            <a:pPr algn="l" indent="0" marL="0">
+              <a:lnSpc>
+                <a:spcPts val="1680"/>
+              </a:lnSpc>
+              <a:spcBef>
+                <a:spcPts val="300"/>
+              </a:spcBef>
+              <a:spcAft>
+                <a:spcPts val="300"/>
+              </a:spcAft>
+              <a:buNone/>
+            </a:pPr>
+            <a:r>
+              <a:rPr lang="en-US" sz="1200" dirty="0">
+                <a:solidFill>
+                  <a:srgbClr val="1C2833"/>
+                </a:solidFill>
+                <a:latin typeface="Arial" pitchFamily="34" charset="0"/>
+                <a:ea typeface="Arial" pitchFamily="34" charset="-122"/>
+                <a:cs typeface="Arial" pitchFamily="34" charset="-120"/>
+              </a:rPr>
+              <a:t>Middle ·  · IKS Curriculum</a:t>
+            </a:r>
+            <a:endParaRPr lang="en-US" sz="1200" dirty="0"/>
+          </a:p>
+        </p:txBody>
+      </p:sp>
+    </p:spTree>
+  </p:cSld>
+  <p:clrMapOvr>
+    <a:masterClrMapping/>
+  </p:clrMapOvr>
+</p:sld>
+</file>
+
+<file path=ppt/slides/slide13.xml><?xml version="1.0" encoding="utf-8"?>
+<p:sld xmlns:a="http://schemas.openxmlformats.org/drawingml/2006/main" xmlns:r="http://schemas.openxmlformats.org/officeDocument/2006/relationships" xmlns:p="http://schemas.openxmlformats.org/presentationml/2006/main">
+  <p:cSld name="Slide 13">
+    <p:bg>
+      <p:bgPr>
+        <a:solidFill>
+          <a:srgbClr val="FFFFFF"/>
+        </a:solidFill>
+      </p:bgPr>
+    </p:bg>
+    <p:spTree>
+      <p:nvGrpSpPr>
+        <p:cNvPr id="1" name=""/>
+        <p:cNvGrpSpPr/>
+        <p:nvPr/>
+      </p:nvGrpSpPr>
+      <p:grpSpPr>
+        <a:xfrm>
+          <a:off x="0" y="0"/>
+          <a:ext cx="0" cy="0"/>
+          <a:chOff x="0" y="0"/>
+          <a:chExt cx="0" cy="0"/>
+        </a:xfrm>
+      </p:grpSpPr>
+      <p:sp>
+        <p:nvSpPr>
+          <p:cNvPr id="2" name="Text 0"/>
+          <p:cNvSpPr/>
+          <p:nvPr/>
+        </p:nvSpPr>
+        <p:spPr>
+          <a:xfrm>
+            <a:off x="0" y="0"/>
+            <a:ext cx="9144000" cy="101501"/>
+          </a:xfrm>
+          <a:prstGeom prst="rect">
+            <a:avLst/>
+          </a:prstGeom>
+          <a:solidFill>
+            <a:srgbClr val="277884"/>
+          </a:solidFill>
+          <a:ln/>
+        </p:spPr>
+        <p:txBody>
+          <a:bodyPr wrap="square" rtlCol="0" anchor="ctr"/>
+          <a:lstStyle/>
+          <a:p>
+            <a:pPr indent="0" marL="0">
+              <a:buNone/>
+            </a:pPr>
+            <a:endParaRPr lang="en-US" dirty="0"/>
+          </a:p>
+        </p:txBody>
+      </p:sp>
+      <p:sp>
+        <p:nvSpPr>
+          <p:cNvPr id="3" name="Text 1"/>
+          <p:cNvSpPr/>
+          <p:nvPr/>
+        </p:nvSpPr>
+        <p:spPr>
+          <a:xfrm>
+            <a:off x="406301" y="457051"/>
+            <a:ext cx="8498026" cy="274290"/>
+          </a:xfrm>
+          <a:prstGeom prst="rect">
+            <a:avLst/>
+          </a:prstGeom>
+          <a:noFill/>
+          <a:ln/>
+        </p:spPr>
+        <p:txBody>
+          <a:bodyPr wrap="square" lIns="0" tIns="0" rIns="0" bIns="0" rtlCol="0" anchor="t"/>
+          <a:lstStyle/>
+          <a:p>
+            <a:pPr algn="l" indent="0" marL="0">
+              <a:lnSpc>
+                <a:spcPts val="2160"/>
+              </a:lnSpc>
+              <a:spcBef>
+                <a:spcPts val="600"/>
+              </a:spcBef>
+              <a:spcAft>
+                <a:spcPts val="800"/>
+              </a:spcAft>
+              <a:buNone/>
+            </a:pPr>
+            <a:r>
+              <a:rPr lang="en-US" sz="1800" b="1" dirty="0">
+                <a:solidFill>
+                  <a:srgbClr val="FE4447"/>
+                </a:solidFill>
+                <a:latin typeface="Georgia" pitchFamily="34" charset="0"/>
+                <a:ea typeface="Georgia" pitchFamily="34" charset="-122"/>
+                <a:cs typeface="Georgia" pitchFamily="34" charset="-120"/>
+              </a:rPr>
+              <a:t>Differentiation</a:t>
+            </a:r>
+            <a:endParaRPr lang="en-US" sz="1800" dirty="0"/>
+          </a:p>
+        </p:txBody>
+      </p:sp>
+      <p:sp>
+        <p:nvSpPr>
+          <p:cNvPr id="4" name="Text 2"/>
+          <p:cNvSpPr/>
+          <p:nvPr/>
+        </p:nvSpPr>
+        <p:spPr>
+          <a:xfrm>
+            <a:off x="634901" y="883593"/>
+            <a:ext cx="8102798" cy="525661"/>
+          </a:xfrm>
+          <a:prstGeom prst="rect">
+            <a:avLst/>
+          </a:prstGeom>
+          <a:noFill/>
+          <a:ln/>
+        </p:spPr>
+        <p:txBody>
+          <a:bodyPr wrap="square" lIns="0" tIns="0" rIns="0" bIns="0" rtlCol="0" anchor="t"/>
+          <a:lstStyle/>
+          <a:p>
+            <a:pPr algn="l" marL="342900" indent="-342900">
+              <a:lnSpc>
+                <a:spcPts val="1620"/>
+              </a:lnSpc>
+              <a:spcAft>
+                <a:spcPts val="300"/>
+              </a:spcAft>
+              <a:buSzPct val="100000"/>
+              <a:buChar char="•"/>
+            </a:pPr>
+            <a:r>
+              <a:rPr lang="en-US" sz="1200" b="1" dirty="0">
+                <a:solidFill>
+                  <a:srgbClr val="1C2833"/>
+                </a:solidFill>
+                <a:latin typeface="Arial" pitchFamily="34" charset="0"/>
+                <a:ea typeface="Arial" pitchFamily="34" charset="-122"/>
+                <a:cs typeface="Arial" pitchFamily="34" charset="-120"/>
+              </a:rPr>
+              <a:t>Tier up:</a:t>
+            </a:r>
+            <a:pPr algn="l" indent="0" marL="0">
+              <a:lnSpc>
+                <a:spcPts val="1620"/>
+              </a:lnSpc>
+              <a:spcAft>
+                <a:spcPts val="300"/>
+              </a:spcAft>
+              <a:buNone/>
+            </a:pPr>
+            <a:r>
+              <a:rPr lang="en-US" sz="1200" dirty="0">
+                <a:solidFill>
+                  <a:srgbClr val="1C2833"/>
+                </a:solidFill>
+                <a:latin typeface="Arial" pitchFamily="34" charset="0"/>
+                <a:ea typeface="Arial" pitchFamily="34" charset="-122"/>
+                <a:cs typeface="Arial" pitchFamily="34" charset="-120"/>
+              </a:rPr>
+              <a:t> Read Wujastyk's intro chapter.</a:t>
+            </a:r>
+            <a:endParaRPr lang="en-US" sz="1200" dirty="0"/>
+          </a:p>
+          <a:p>
+            <a:pPr algn="l" marL="342900" indent="-342900">
+              <a:lnSpc>
+                <a:spcPts val="1620"/>
+              </a:lnSpc>
+              <a:spcAft>
+                <a:spcPts val="300"/>
+              </a:spcAft>
+              <a:buSzPct val="100000"/>
+              <a:buChar char="•"/>
+            </a:pPr>
+            <a:r>
+              <a:rPr lang="en-US" sz="1200" b="1" dirty="0">
+                <a:solidFill>
+                  <a:srgbClr val="1C2833"/>
+                </a:solidFill>
+                <a:latin typeface="Arial" pitchFamily="34" charset="0"/>
+                <a:ea typeface="Arial" pitchFamily="34" charset="-122"/>
+                <a:cs typeface="Arial" pitchFamily="34" charset="-120"/>
+              </a:rPr>
+              <a:t>Tier down:</a:t>
+            </a:r>
+            <a:pPr algn="l" indent="0" marL="0">
+              <a:lnSpc>
+                <a:spcPts val="1620"/>
+              </a:lnSpc>
+              <a:spcAft>
+                <a:spcPts val="300"/>
+              </a:spcAft>
+              <a:buNone/>
+            </a:pPr>
+            <a:r>
+              <a:rPr lang="en-US" sz="1200" dirty="0">
+                <a:solidFill>
+                  <a:srgbClr val="1C2833"/>
+                </a:solidFill>
+                <a:latin typeface="Arial" pitchFamily="34" charset="0"/>
+                <a:ea typeface="Arial" pitchFamily="34" charset="-122"/>
+                <a:cs typeface="Arial" pitchFamily="34" charset="-120"/>
+              </a:rPr>
+              <a:t> Just memorise </a:t>
+            </a:r>
+            <a:pPr algn="l" indent="0" marL="0">
+              <a:lnSpc>
+                <a:spcPts val="1620"/>
+              </a:lnSpc>
+              <a:spcAft>
+                <a:spcPts val="300"/>
+              </a:spcAft>
+              <a:buNone/>
+            </a:pPr>
+            <a:r>
+              <a:rPr lang="en-US" sz="1200" i="1" dirty="0">
+                <a:solidFill>
+                  <a:srgbClr val="1C2833"/>
+                </a:solidFill>
+                <a:latin typeface="Arial" pitchFamily="34" charset="0"/>
+                <a:ea typeface="Arial" pitchFamily="34" charset="-122"/>
+                <a:cs typeface="Arial" pitchFamily="34" charset="-120"/>
+              </a:rPr>
+              <a:t>Āyurveda</a:t>
+            </a:r>
+            <a:pPr algn="l" indent="0" marL="0">
+              <a:lnSpc>
+                <a:spcPts val="1620"/>
+              </a:lnSpc>
+              <a:spcAft>
+                <a:spcPts val="300"/>
+              </a:spcAft>
+              <a:buNone/>
+            </a:pPr>
+            <a:r>
+              <a:rPr lang="en-US" sz="1200" dirty="0">
+                <a:solidFill>
+                  <a:srgbClr val="1C2833"/>
+                </a:solidFill>
+                <a:latin typeface="Arial" pitchFamily="34" charset="0"/>
+                <a:ea typeface="Arial" pitchFamily="34" charset="-122"/>
+                <a:cs typeface="Arial" pitchFamily="34" charset="-120"/>
+              </a:rPr>
+              <a:t> (science of life) and </a:t>
+            </a:r>
+            <a:pPr algn="l" indent="0" marL="0">
+              <a:lnSpc>
+                <a:spcPts val="1620"/>
+              </a:lnSpc>
+              <a:spcAft>
+                <a:spcPts val="300"/>
+              </a:spcAft>
+              <a:buNone/>
+            </a:pPr>
+            <a:r>
+              <a:rPr lang="en-US" sz="1200" i="1" dirty="0">
+                <a:solidFill>
+                  <a:srgbClr val="1C2833"/>
+                </a:solidFill>
+                <a:latin typeface="Arial" pitchFamily="34" charset="0"/>
+                <a:ea typeface="Arial" pitchFamily="34" charset="-122"/>
+                <a:cs typeface="Arial" pitchFamily="34" charset="-120"/>
+              </a:rPr>
+              <a:t>Swasthya</a:t>
+            </a:r>
+            <a:pPr algn="l" indent="0" marL="0">
+              <a:lnSpc>
+                <a:spcPts val="1620"/>
+              </a:lnSpc>
+              <a:spcAft>
+                <a:spcPts val="300"/>
+              </a:spcAft>
+              <a:buNone/>
+            </a:pPr>
+            <a:r>
+              <a:rPr lang="en-US" sz="1200" dirty="0">
+                <a:solidFill>
+                  <a:srgbClr val="1C2833"/>
+                </a:solidFill>
+                <a:latin typeface="Arial" pitchFamily="34" charset="0"/>
+                <a:ea typeface="Arial" pitchFamily="34" charset="-122"/>
+                <a:cs typeface="Arial" pitchFamily="34" charset="-120"/>
+              </a:rPr>
+              <a:t> (wellbeing).</a:t>
+            </a:r>
+            <a:endParaRPr lang="en-US" sz="1200" dirty="0"/>
+          </a:p>
+        </p:txBody>
+      </p:sp>
+      <p:sp>
+        <p:nvSpPr>
+          <p:cNvPr id="5" name="Text 3"/>
+          <p:cNvSpPr/>
+          <p:nvPr/>
+        </p:nvSpPr>
+        <p:spPr>
+          <a:xfrm>
+            <a:off x="406301" y="4434929"/>
+            <a:ext cx="8498026" cy="213271"/>
+          </a:xfrm>
+          <a:prstGeom prst="rect">
+            <a:avLst/>
+          </a:prstGeom>
+          <a:noFill/>
+          <a:ln/>
+        </p:spPr>
+        <p:txBody>
+          <a:bodyPr wrap="square" lIns="0" tIns="0" rIns="0" bIns="0" rtlCol="0" anchor="t"/>
+          <a:lstStyle/>
+          <a:p>
+            <a:pPr algn="l" indent="0" marL="0">
+              <a:lnSpc>
+                <a:spcPts val="1680"/>
+              </a:lnSpc>
+              <a:spcBef>
+                <a:spcPts val="300"/>
+              </a:spcBef>
+              <a:spcAft>
+                <a:spcPts val="300"/>
+              </a:spcAft>
+              <a:buNone/>
+            </a:pPr>
+            <a:r>
+              <a:rPr lang="en-US" sz="1200" dirty="0">
+                <a:solidFill>
+                  <a:srgbClr val="1C2833"/>
+                </a:solidFill>
+                <a:latin typeface="Arial" pitchFamily="34" charset="0"/>
+                <a:ea typeface="Arial" pitchFamily="34" charset="-122"/>
+                <a:cs typeface="Arial" pitchFamily="34" charset="-120"/>
+              </a:rPr>
+              <a:t>Middle ·  · IKS Curriculum</a:t>
+            </a:r>
+            <a:endParaRPr lang="en-US" sz="1200" dirty="0"/>
+          </a:p>
+        </p:txBody>
+      </p:sp>
+    </p:spTree>
+  </p:cSld>
+  <p:clrMapOvr>
+    <a:masterClrMapping/>
+  </p:clrMapOvr>
+</p:sld>
+</file>
+
+<file path=ppt/slides/slide14.xml><?xml version="1.0" encoding="utf-8"?>
+<p:sld xmlns:a="http://schemas.openxmlformats.org/drawingml/2006/main" xmlns:r="http://schemas.openxmlformats.org/officeDocument/2006/relationships" xmlns:p="http://schemas.openxmlformats.org/presentationml/2006/main">
+  <p:cSld name="Slide 14">
+    <p:bg>
+      <p:bgPr>
+        <a:solidFill>
+          <a:srgbClr val="FFFFFF"/>
+        </a:solidFill>
+      </p:bgPr>
+    </p:bg>
+    <p:spTree>
+      <p:nvGrpSpPr>
+        <p:cNvPr id="1" name=""/>
+        <p:cNvGrpSpPr/>
+        <p:nvPr/>
+      </p:nvGrpSpPr>
+      <p:grpSpPr>
+        <a:xfrm>
+          <a:off x="0" y="0"/>
+          <a:ext cx="0" cy="0"/>
+          <a:chOff x="0" y="0"/>
+          <a:chExt cx="0" cy="0"/>
+        </a:xfrm>
+      </p:grpSpPr>
+      <p:sp>
+        <p:nvSpPr>
+          <p:cNvPr id="2" name="Text 0"/>
+          <p:cNvSpPr/>
+          <p:nvPr/>
+        </p:nvSpPr>
+        <p:spPr>
+          <a:xfrm>
+            <a:off x="0" y="0"/>
+            <a:ext cx="9144000" cy="101501"/>
+          </a:xfrm>
+          <a:prstGeom prst="rect">
+            <a:avLst/>
+          </a:prstGeom>
+          <a:solidFill>
+            <a:srgbClr val="277884"/>
+          </a:solidFill>
+          <a:ln/>
+        </p:spPr>
+        <p:txBody>
+          <a:bodyPr wrap="square" rtlCol="0" anchor="ctr"/>
+          <a:lstStyle/>
+          <a:p>
+            <a:pPr indent="0" marL="0">
+              <a:buNone/>
+            </a:pPr>
+            <a:endParaRPr lang="en-US" dirty="0"/>
+          </a:p>
+        </p:txBody>
+      </p:sp>
+      <p:sp>
+        <p:nvSpPr>
+          <p:cNvPr id="3" name="Text 1"/>
+          <p:cNvSpPr/>
+          <p:nvPr/>
+        </p:nvSpPr>
+        <p:spPr>
+          <a:xfrm>
+            <a:off x="406301" y="457051"/>
+            <a:ext cx="8498026" cy="274290"/>
+          </a:xfrm>
+          <a:prstGeom prst="rect">
+            <a:avLst/>
+          </a:prstGeom>
+          <a:noFill/>
+          <a:ln/>
+        </p:spPr>
+        <p:txBody>
+          <a:bodyPr wrap="square" lIns="0" tIns="0" rIns="0" bIns="0" rtlCol="0" anchor="t"/>
+          <a:lstStyle/>
+          <a:p>
+            <a:pPr algn="l" indent="0" marL="0">
+              <a:lnSpc>
+                <a:spcPts val="2160"/>
+              </a:lnSpc>
+              <a:spcBef>
+                <a:spcPts val="600"/>
+              </a:spcBef>
+              <a:spcAft>
+                <a:spcPts val="800"/>
+              </a:spcAft>
+              <a:buNone/>
+            </a:pPr>
+            <a:r>
+              <a:rPr lang="en-US" sz="1800" b="1" dirty="0">
+                <a:solidFill>
+                  <a:srgbClr val="FE4447"/>
+                </a:solidFill>
+                <a:latin typeface="Georgia" pitchFamily="34" charset="0"/>
+                <a:ea typeface="Georgia" pitchFamily="34" charset="-122"/>
+                <a:cs typeface="Georgia" pitchFamily="34" charset="-120"/>
+              </a:rPr>
+              <a:t>Teacher notes</a:t>
+            </a:r>
+            <a:endParaRPr lang="en-US" sz="1800" dirty="0"/>
+          </a:p>
+        </p:txBody>
+      </p:sp>
+      <p:sp>
+        <p:nvSpPr>
+          <p:cNvPr id="4" name="Text 2"/>
+          <p:cNvSpPr/>
+          <p:nvPr/>
+        </p:nvSpPr>
+        <p:spPr>
+          <a:xfrm>
+            <a:off x="634901" y="883593"/>
+            <a:ext cx="8102798" cy="525661"/>
+          </a:xfrm>
+          <a:prstGeom prst="rect">
+            <a:avLst/>
+          </a:prstGeom>
+          <a:noFill/>
+          <a:ln/>
+        </p:spPr>
+        <p:txBody>
+          <a:bodyPr wrap="square" lIns="0" tIns="0" rIns="0" bIns="0" rtlCol="0" anchor="t"/>
+          <a:lstStyle/>
+          <a:p>
+            <a:pPr algn="l" marL="342900" indent="-342900">
+              <a:lnSpc>
+                <a:spcPts val="1620"/>
+              </a:lnSpc>
+              <a:spcAft>
+                <a:spcPts val="300"/>
+              </a:spcAft>
+              <a:buSzPct val="100000"/>
+              <a:buChar char="•"/>
+            </a:pPr>
+            <a:r>
+              <a:rPr lang="en-US" sz="1200" dirty="0">
+                <a:solidFill>
+                  <a:srgbClr val="1C2833"/>
+                </a:solidFill>
+                <a:latin typeface="Arial" pitchFamily="34" charset="0"/>
+                <a:ea typeface="Arial" pitchFamily="34" charset="-122"/>
+                <a:cs typeface="Arial" pitchFamily="34" charset="-120"/>
+              </a:rPr>
+              <a:t>The "8 branches" detail is for students who want depth. At Middle band, the 6 mentioned items are enough.</a:t>
+            </a:r>
+            <a:endParaRPr lang="en-US" sz="1200" dirty="0"/>
+          </a:p>
+          <a:p>
+            <a:pPr algn="l" marL="342900" indent="-342900">
+              <a:lnSpc>
+                <a:spcPts val="1620"/>
+              </a:lnSpc>
+              <a:spcAft>
+                <a:spcPts val="300"/>
+              </a:spcAft>
+              <a:buSzPct val="100000"/>
+              <a:buChar char="•"/>
+            </a:pPr>
+            <a:r>
+              <a:rPr lang="en-US" sz="1200" dirty="0">
+                <a:solidFill>
+                  <a:srgbClr val="1C2833"/>
+                </a:solidFill>
+                <a:latin typeface="Arial" pitchFamily="34" charset="0"/>
+                <a:ea typeface="Arial" pitchFamily="34" charset="-122"/>
+                <a:cs typeface="Arial" pitchFamily="34" charset="-120"/>
+              </a:rPr>
+              <a:t>Watch for students with health conditions — don't single them out or imply Ayurveda is for them.</a:t>
+            </a:r>
+            <a:endParaRPr lang="en-US" sz="1200" dirty="0"/>
+          </a:p>
+        </p:txBody>
+      </p:sp>
+      <p:sp>
+        <p:nvSpPr>
+          <p:cNvPr id="5" name="Text 3"/>
+          <p:cNvSpPr/>
+          <p:nvPr/>
+        </p:nvSpPr>
+        <p:spPr>
+          <a:xfrm>
+            <a:off x="406301" y="4434929"/>
+            <a:ext cx="8498026" cy="213271"/>
+          </a:xfrm>
+          <a:prstGeom prst="rect">
+            <a:avLst/>
+          </a:prstGeom>
+          <a:noFill/>
+          <a:ln/>
+        </p:spPr>
+        <p:txBody>
+          <a:bodyPr wrap="square" lIns="0" tIns="0" rIns="0" bIns="0" rtlCol="0" anchor="t"/>
+          <a:lstStyle/>
+          <a:p>
+            <a:pPr algn="l" indent="0" marL="0">
+              <a:lnSpc>
+                <a:spcPts val="1680"/>
+              </a:lnSpc>
+              <a:spcBef>
+                <a:spcPts val="300"/>
+              </a:spcBef>
+              <a:spcAft>
+                <a:spcPts val="300"/>
+              </a:spcAft>
+              <a:buNone/>
+            </a:pPr>
+            <a:r>
+              <a:rPr lang="en-US" sz="1200" dirty="0">
+                <a:solidFill>
+                  <a:srgbClr val="1C2833"/>
+                </a:solidFill>
+                <a:latin typeface="Arial" pitchFamily="34" charset="0"/>
+                <a:ea typeface="Arial" pitchFamily="34" charset="-122"/>
+                <a:cs typeface="Arial" pitchFamily="34" charset="-120"/>
+              </a:rPr>
+              <a:t>Middle ·  · IKS Curriculum</a:t>
+            </a:r>
+            <a:endParaRPr lang="en-US" sz="1200" dirty="0"/>
+          </a:p>
+        </p:txBody>
+      </p:sp>
+    </p:spTree>
+  </p:cSld>
+  <p:clrMapOvr>
+    <a:masterClrMapping/>
+  </p:clrMapOvr>
+</p:sld>
+</file>
+
+<file path=ppt/slides/slide15.xml><?xml version="1.0" encoding="utf-8"?>
+<p:sld xmlns:a="http://schemas.openxmlformats.org/drawingml/2006/main" xmlns:r="http://schemas.openxmlformats.org/officeDocument/2006/relationships" xmlns:p="http://schemas.openxmlformats.org/presentationml/2006/main">
+  <p:cSld name="Slide 15">
+    <p:bg>
+      <p:bgPr>
+        <a:solidFill>
+          <a:srgbClr val="FFFFFF"/>
+        </a:solidFill>
+      </p:bgPr>
+    </p:bg>
+    <p:spTree>
+      <p:nvGrpSpPr>
+        <p:cNvPr id="1" name=""/>
+        <p:cNvGrpSpPr/>
+        <p:nvPr/>
+      </p:nvGrpSpPr>
+      <p:grpSpPr>
+        <a:xfrm>
+          <a:off x="0" y="0"/>
+          <a:ext cx="0" cy="0"/>
+          <a:chOff x="0" y="0"/>
+          <a:chExt cx="0" cy="0"/>
+        </a:xfrm>
+      </p:grpSpPr>
+      <p:sp>
+        <p:nvSpPr>
+          <p:cNvPr id="2" name="Text 0"/>
+          <p:cNvSpPr/>
+          <p:nvPr/>
+        </p:nvSpPr>
+        <p:spPr>
+          <a:xfrm>
+            <a:off x="0" y="0"/>
+            <a:ext cx="9144000" cy="101501"/>
+          </a:xfrm>
+          <a:prstGeom prst="rect">
+            <a:avLst/>
+          </a:prstGeom>
+          <a:solidFill>
+            <a:srgbClr val="277884"/>
+          </a:solidFill>
+          <a:ln/>
+        </p:spPr>
+        <p:txBody>
+          <a:bodyPr wrap="square" rtlCol="0" anchor="ctr"/>
+          <a:lstStyle/>
+          <a:p>
+            <a:pPr indent="0" marL="0">
+              <a:buNone/>
+            </a:pPr>
+            <a:endParaRPr lang="en-US" dirty="0"/>
+          </a:p>
+        </p:txBody>
+      </p:sp>
+      <p:sp>
+        <p:nvSpPr>
+          <p:cNvPr id="3" name="Text 1"/>
+          <p:cNvSpPr/>
+          <p:nvPr/>
+        </p:nvSpPr>
+        <p:spPr>
+          <a:xfrm>
+            <a:off x="406301" y="457051"/>
+            <a:ext cx="8498026" cy="274290"/>
+          </a:xfrm>
+          <a:prstGeom prst="rect">
+            <a:avLst/>
+          </a:prstGeom>
+          <a:noFill/>
+          <a:ln/>
+        </p:spPr>
+        <p:txBody>
+          <a:bodyPr wrap="square" lIns="0" tIns="0" rIns="0" bIns="0" rtlCol="0" anchor="t"/>
+          <a:lstStyle/>
+          <a:p>
+            <a:pPr algn="l" indent="0" marL="0">
+              <a:lnSpc>
+                <a:spcPts val="2160"/>
+              </a:lnSpc>
+              <a:spcBef>
+                <a:spcPts val="600"/>
+              </a:spcBef>
+              <a:spcAft>
+                <a:spcPts val="800"/>
+              </a:spcAft>
+              <a:buNone/>
+            </a:pPr>
+            <a:r>
+              <a:rPr lang="en-US" sz="1800" b="1" dirty="0">
+                <a:solidFill>
+                  <a:srgbClr val="FE4447"/>
+                </a:solidFill>
+                <a:latin typeface="Georgia" pitchFamily="34" charset="0"/>
+                <a:ea typeface="Georgia" pitchFamily="34" charset="-122"/>
+                <a:cs typeface="Georgia" pitchFamily="34" charset="-120"/>
+              </a:rPr>
+              <a:t>Citation(s) used</a:t>
+            </a:r>
+            <a:endParaRPr lang="en-US" sz="1800" dirty="0"/>
+          </a:p>
+        </p:txBody>
+      </p:sp>
+      <p:sp>
+        <p:nvSpPr>
+          <p:cNvPr id="4" name="Text 2"/>
+          <p:cNvSpPr/>
+          <p:nvPr/>
+        </p:nvSpPr>
+        <p:spPr>
+          <a:xfrm>
+            <a:off x="634901" y="883593"/>
+            <a:ext cx="8102798" cy="544711"/>
+          </a:xfrm>
+          <a:prstGeom prst="rect">
+            <a:avLst/>
+          </a:prstGeom>
+          <a:noFill/>
+          <a:ln/>
+        </p:spPr>
+        <p:txBody>
+          <a:bodyPr wrap="square" lIns="0" tIns="0" rIns="0" bIns="0" rtlCol="0" anchor="t"/>
+          <a:lstStyle/>
+          <a:p>
+            <a:pPr algn="l" marL="342900" indent="-342900">
+              <a:lnSpc>
+                <a:spcPts val="1620"/>
+              </a:lnSpc>
+              <a:spcAft>
+                <a:spcPts val="300"/>
+              </a:spcAft>
+              <a:buSzPct val="100000"/>
+              <a:buChar char="•"/>
+            </a:pPr>
+            <a:r>
+              <a:rPr lang="en-US" sz="1200" dirty="0">
+                <a:solidFill>
+                  <a:srgbClr val="1C2833"/>
+                </a:solidFill>
+                <a:latin typeface="Arial" pitchFamily="34" charset="0"/>
+                <a:ea typeface="Arial" pitchFamily="34" charset="-122"/>
+                <a:cs typeface="Arial" pitchFamily="34" charset="-120"/>
+              </a:rPr>
+              <a:t>vidya-karana RAG cache </a:t>
+            </a:r>
+            <a:pPr algn="l" indent="0" marL="0">
+              <a:lnSpc>
+                <a:spcPts val="1620"/>
+              </a:lnSpc>
+              <a:spcAft>
+                <a:spcPts val="300"/>
+              </a:spcAft>
+              <a:buNone/>
+            </a:pPr>
+            <a:r>
+              <a:rPr lang="en-US" sz="1200" dirty="0">
+                <a:solidFill>
+                  <a:srgbClr val="1C2833"/>
+                </a:solidFill>
+                <a:latin typeface="Arial" pitchFamily="34" charset="0"/>
+                <a:ea typeface="Arial" pitchFamily="34" charset="-122"/>
+                <a:cs typeface="Arial" pitchFamily="34" charset="-120"/>
+              </a:rPr>
+              <a:t>day-01-intro.json</a:t>
+            </a:r>
+            <a:pPr algn="l" indent="0" marL="0">
+              <a:lnSpc>
+                <a:spcPts val="1620"/>
+              </a:lnSpc>
+              <a:spcAft>
+                <a:spcPts val="300"/>
+              </a:spcAft>
+              <a:buNone/>
+            </a:pPr>
+            <a:r>
+              <a:rPr lang="en-US" sz="1200" dirty="0">
+                <a:solidFill>
+                  <a:srgbClr val="1C2833"/>
+                </a:solidFill>
+                <a:latin typeface="Arial" pitchFamily="34" charset="0"/>
+                <a:ea typeface="Arial" pitchFamily="34" charset="-122"/>
+                <a:cs typeface="Arial" pitchFamily="34" charset="-120"/>
+              </a:rPr>
+              <a:t> for general Ayurveda framing.</a:t>
+            </a:r>
+            <a:endParaRPr lang="en-US" sz="1200" dirty="0"/>
+          </a:p>
+          <a:p>
+            <a:pPr algn="l" marL="342900" indent="-342900">
+              <a:lnSpc>
+                <a:spcPts val="1620"/>
+              </a:lnSpc>
+              <a:spcAft>
+                <a:spcPts val="300"/>
+              </a:spcAft>
+              <a:buSzPct val="100000"/>
+              <a:buChar char="•"/>
+            </a:pPr>
+            <a:r>
+              <a:rPr lang="en-US" sz="1200" dirty="0">
+                <a:solidFill>
+                  <a:srgbClr val="1C2833"/>
+                </a:solidFill>
+                <a:latin typeface="Arial" pitchFamily="34" charset="0"/>
+                <a:ea typeface="Arial" pitchFamily="34" charset="-122"/>
+                <a:cs typeface="Arial" pitchFamily="34" charset="-120"/>
+              </a:rPr>
+              <a:t>Wujastyk (2003) for scope.</a:t>
+            </a:r>
+            <a:endParaRPr lang="en-US" sz="1200" dirty="0"/>
+          </a:p>
+        </p:txBody>
+      </p:sp>
+      <p:sp>
+        <p:nvSpPr>
+          <p:cNvPr id="5" name="Text 3"/>
           <p:cNvSpPr/>
           <p:nvPr/>
         </p:nvSpPr>
@@ -2795,7 +4060,7 @@
                 <a:ea typeface="Georgia" pitchFamily="34" charset="-122"/>
                 <a:cs typeface="Georgia" pitchFamily="34" charset="-120"/>
               </a:rPr>
-              <a:t>Materials</a:t>
+              <a:t>Learning objective</a:t>
             </a:r>
             <a:endParaRPr lang="en-US" sz="1800" dirty="0"/>
           </a:p>
@@ -2810,7 +4075,7 @@
         <p:spPr>
           <a:xfrm>
             <a:off x="406301" y="870942"/>
-            <a:ext cx="8498026" cy="213271"/>
+            <a:ext cx="8498026" cy="426541"/>
           </a:xfrm>
           <a:prstGeom prst="rect">
             <a:avLst/>
@@ -2843,7 +4108,99 @@
                 <a:ea typeface="Arial" pitchFamily="34" charset="-122"/>
                 <a:cs typeface="Arial" pitchFamily="34" charset="-120"/>
               </a:rPr>
-              <a:t>– Whiteboard – A few sample herbs (turmeric, tulsi if available — check allergies)</a:t>
+              <a:t>Students define </a:t>
+            </a:r>
+            <a:pPr algn="l" indent="0" marL="0">
+              <a:lnSpc>
+                <a:spcPts val="1680"/>
+              </a:lnSpc>
+              <a:spcBef>
+                <a:spcPts val="300"/>
+              </a:spcBef>
+              <a:spcAft>
+                <a:spcPts val="300"/>
+              </a:spcAft>
+              <a:buNone/>
+            </a:pPr>
+            <a:r>
+              <a:rPr lang="en-US" sz="1200" i="1" dirty="0">
+                <a:solidFill>
+                  <a:srgbClr val="1C2833"/>
+                </a:solidFill>
+                <a:latin typeface="Arial" pitchFamily="34" charset="0"/>
+                <a:ea typeface="Arial" pitchFamily="34" charset="-122"/>
+                <a:cs typeface="Arial" pitchFamily="34" charset="-120"/>
+              </a:rPr>
+              <a:t>Āyurveda</a:t>
+            </a:r>
+            <a:pPr algn="l" indent="0" marL="0">
+              <a:lnSpc>
+                <a:spcPts val="1680"/>
+              </a:lnSpc>
+              <a:spcBef>
+                <a:spcPts val="300"/>
+              </a:spcBef>
+              <a:spcAft>
+                <a:spcPts val="300"/>
+              </a:spcAft>
+              <a:buNone/>
+            </a:pPr>
+            <a:r>
+              <a:rPr lang="en-US" sz="1200" dirty="0">
+                <a:solidFill>
+                  <a:srgbClr val="1C2833"/>
+                </a:solidFill>
+                <a:latin typeface="Arial" pitchFamily="34" charset="0"/>
+                <a:ea typeface="Arial" pitchFamily="34" charset="-122"/>
+                <a:cs typeface="Arial" pitchFamily="34" charset="-120"/>
+              </a:rPr>
+              <a:t> and </a:t>
+            </a:r>
+            <a:pPr algn="l" indent="0" marL="0">
+              <a:lnSpc>
+                <a:spcPts val="1680"/>
+              </a:lnSpc>
+              <a:spcBef>
+                <a:spcPts val="300"/>
+              </a:spcBef>
+              <a:spcAft>
+                <a:spcPts val="300"/>
+              </a:spcAft>
+              <a:buNone/>
+            </a:pPr>
+            <a:r>
+              <a:rPr lang="en-US" sz="1200" i="1" dirty="0">
+                <a:solidFill>
+                  <a:srgbClr val="1C2833"/>
+                </a:solidFill>
+                <a:latin typeface="Arial" pitchFamily="34" charset="0"/>
+                <a:ea typeface="Arial" pitchFamily="34" charset="-122"/>
+                <a:cs typeface="Arial" pitchFamily="34" charset="-120"/>
+              </a:rPr>
+              <a:t>Swasthya</a:t>
+            </a:r>
+            <a:pPr algn="l" indent="0" marL="0">
+              <a:lnSpc>
+                <a:spcPts val="1680"/>
+              </a:lnSpc>
+              <a:spcBef>
+                <a:spcPts val="300"/>
+              </a:spcBef>
+              <a:spcAft>
+                <a:spcPts val="300"/>
+              </a:spcAft>
+              <a:buNone/>
+            </a:pPr>
+            <a:r>
+              <a:rPr lang="en-US" sz="1200" dirty="0">
+                <a:solidFill>
+                  <a:srgbClr val="1C2833"/>
+                </a:solidFill>
+                <a:latin typeface="Arial" pitchFamily="34" charset="0"/>
+                <a:ea typeface="Arial" pitchFamily="34" charset="-122"/>
+                <a:cs typeface="Arial" pitchFamily="34" charset="-120"/>
+              </a:rPr>
+              <a:t> and articulate the scope of the framework (lifestyle, prevention, herbal medicine — not surgery or acute care).</a:t>
             </a:r>
             <a:endParaRPr lang="en-US" sz="1200" dirty="0"/>
           </a:p>
@@ -3001,7 +4358,7 @@
                 <a:ea typeface="Georgia" pitchFamily="34" charset="-122"/>
                 <a:cs typeface="Georgia" pitchFamily="34" charset="-120"/>
               </a:rPr>
-              <a:t>Flow</a:t>
+              <a:t>Materials</a:t>
             </a:r>
             <a:endParaRPr lang="en-US" sz="1800" dirty="0"/>
           </a:p>
@@ -3010,6 +4367,76 @@
       <p:sp>
         <p:nvSpPr>
           <p:cNvPr id="4" name="Text 2"/>
+          <p:cNvSpPr/>
+          <p:nvPr/>
+        </p:nvSpPr>
+        <p:spPr>
+          <a:xfrm>
+            <a:off x="634901" y="883593"/>
+            <a:ext cx="8102798" cy="525661"/>
+          </a:xfrm>
+          <a:prstGeom prst="rect">
+            <a:avLst/>
+          </a:prstGeom>
+          <a:noFill/>
+          <a:ln/>
+        </p:spPr>
+        <p:txBody>
+          <a:bodyPr wrap="square" lIns="0" tIns="0" rIns="0" bIns="0" rtlCol="0" anchor="t"/>
+          <a:lstStyle/>
+          <a:p>
+            <a:pPr algn="l" marL="342900" indent="-342900">
+              <a:lnSpc>
+                <a:spcPts val="1620"/>
+              </a:lnSpc>
+              <a:spcAft>
+                <a:spcPts val="300"/>
+              </a:spcAft>
+              <a:buSzPct val="100000"/>
+              <a:buChar char="•"/>
+            </a:pPr>
+            <a:r>
+              <a:rPr lang="en-US" sz="1200" dirty="0">
+                <a:solidFill>
+                  <a:srgbClr val="1C2833"/>
+                </a:solidFill>
+                <a:latin typeface="Arial" pitchFamily="34" charset="0"/>
+                <a:ea typeface="Arial" pitchFamily="34" charset="-122"/>
+                <a:cs typeface="Arial" pitchFamily="34" charset="-120"/>
+              </a:rPr>
+              <a:t>Whiteboard</a:t>
+            </a:r>
+            <a:endParaRPr lang="en-US" sz="1200" dirty="0"/>
+          </a:p>
+          <a:p>
+            <a:pPr algn="l" marL="342900" indent="-342900">
+              <a:lnSpc>
+                <a:spcPts val="1620"/>
+              </a:lnSpc>
+              <a:spcAft>
+                <a:spcPts val="300"/>
+              </a:spcAft>
+              <a:buSzPct val="100000"/>
+              <a:buChar char="•"/>
+            </a:pPr>
+            <a:r>
+              <a:rPr lang="en-US" sz="1200" dirty="0">
+                <a:solidFill>
+                  <a:srgbClr val="1C2833"/>
+                </a:solidFill>
+                <a:latin typeface="Arial" pitchFamily="34" charset="0"/>
+                <a:ea typeface="Arial" pitchFamily="34" charset="-122"/>
+                <a:cs typeface="Arial" pitchFamily="34" charset="-120"/>
+              </a:rPr>
+              <a:t>A few sample herbs (turmeric, tulsi if available — check allergies)</a:t>
+            </a:r>
+            <a:endParaRPr lang="en-US" sz="1200" dirty="0"/>
+          </a:p>
+        </p:txBody>
+      </p:sp>
+      <p:sp>
+        <p:nvSpPr>
+          <p:cNvPr id="5" name="Text 3"/>
           <p:cNvSpPr/>
           <p:nvPr/>
         </p:nvSpPr>
@@ -3159,7 +4586,7 @@
                 <a:ea typeface="Georgia" pitchFamily="34" charset="-122"/>
                 <a:cs typeface="Georgia" pitchFamily="34" charset="-120"/>
               </a:rPr>
-              <a:t>Warm-up (5 min)</a:t>
+              <a:t>Flow</a:t>
             </a:r>
             <a:endParaRPr lang="en-US" sz="1800" dirty="0"/>
           </a:p>
@@ -3168,125 +4595,6 @@
       <p:sp>
         <p:nvSpPr>
           <p:cNvPr id="4" name="Text 2"/>
-          <p:cNvSpPr/>
-          <p:nvPr/>
-        </p:nvSpPr>
-        <p:spPr>
-          <a:xfrm>
-            <a:off x="406301" y="870942"/>
-            <a:ext cx="8498026" cy="213271"/>
-          </a:xfrm>
-          <a:prstGeom prst="rect">
-            <a:avLst/>
-          </a:prstGeom>
-          <a:noFill/>
-          <a:ln/>
-        </p:spPr>
-        <p:txBody>
-          <a:bodyPr wrap="square" lIns="0" tIns="0" rIns="0" bIns="0" rtlCol="0" anchor="t"/>
-          <a:lstStyle/>
-          <a:p>
-            <a:pPr algn="l" indent="0" marL="0">
-              <a:lnSpc>
-                <a:spcPts val="1680"/>
-              </a:lnSpc>
-              <a:spcBef>
-                <a:spcPts val="300"/>
-              </a:spcBef>
-              <a:spcAft>
-                <a:spcPts val="300"/>
-              </a:spcAft>
-              <a:buNone/>
-            </a:pPr>
-            <a:r>
-              <a:rPr lang="en-US" sz="1200" dirty="0">
-                <a:solidFill>
-                  <a:srgbClr val="1C2833"/>
-                </a:solidFill>
-                <a:latin typeface="Arial" pitchFamily="34" charset="0"/>
-                <a:ea typeface="Arial" pitchFamily="34" charset="-122"/>
-                <a:cs typeface="Arial" pitchFamily="34" charset="-120"/>
-              </a:rPr>
-              <a:t>Provocation: </a:t>
-            </a:r>
-            <a:pPr algn="l" indent="0" marL="0">
-              <a:lnSpc>
-                <a:spcPts val="1680"/>
-              </a:lnSpc>
-              <a:spcBef>
-                <a:spcPts val="300"/>
-              </a:spcBef>
-              <a:spcAft>
-                <a:spcPts val="300"/>
-              </a:spcAft>
-              <a:buNone/>
-            </a:pPr>
-            <a:r>
-              <a:rPr lang="en-US" sz="1200" i="1" dirty="0">
-                <a:solidFill>
-                  <a:srgbClr val="1C2833"/>
-                </a:solidFill>
-                <a:latin typeface="Arial" pitchFamily="34" charset="0"/>
-                <a:ea typeface="Arial" pitchFamily="34" charset="-122"/>
-                <a:cs typeface="Arial" pitchFamily="34" charset="-120"/>
-              </a:rPr>
-              <a:t>"If someone said to you 'what is Ayurveda?', what would you say in one sentence?"</a:t>
-            </a:r>
-            <a:endParaRPr lang="en-US" sz="1200" dirty="0"/>
-          </a:p>
-        </p:txBody>
-      </p:sp>
-      <p:sp>
-        <p:nvSpPr>
-          <p:cNvPr id="5" name="Text 3"/>
-          <p:cNvSpPr/>
-          <p:nvPr/>
-        </p:nvSpPr>
-        <p:spPr>
-          <a:xfrm>
-            <a:off x="406301" y="1160413"/>
-            <a:ext cx="8498026" cy="213271"/>
-          </a:xfrm>
-          <a:prstGeom prst="rect">
-            <a:avLst/>
-          </a:prstGeom>
-          <a:noFill/>
-          <a:ln/>
-        </p:spPr>
-        <p:txBody>
-          <a:bodyPr wrap="square" lIns="0" tIns="0" rIns="0" bIns="0" rtlCol="0" anchor="t"/>
-          <a:lstStyle/>
-          <a:p>
-            <a:pPr algn="l" indent="0" marL="0">
-              <a:lnSpc>
-                <a:spcPts val="1680"/>
-              </a:lnSpc>
-              <a:spcBef>
-                <a:spcPts val="300"/>
-              </a:spcBef>
-              <a:spcAft>
-                <a:spcPts val="300"/>
-              </a:spcAft>
-              <a:buNone/>
-            </a:pPr>
-            <a:r>
-              <a:rPr lang="en-US" sz="1200" dirty="0">
-                <a:solidFill>
-                  <a:srgbClr val="1C2833"/>
-                </a:solidFill>
-                <a:latin typeface="Arial" pitchFamily="34" charset="0"/>
-                <a:ea typeface="Arial" pitchFamily="34" charset="-122"/>
-                <a:cs typeface="Arial" pitchFamily="34" charset="-120"/>
-              </a:rPr>
-              <a:t>Take 3 student answers.</a:t>
-            </a:r>
-            <a:endParaRPr lang="en-US" sz="1200" dirty="0"/>
-          </a:p>
-        </p:txBody>
-      </p:sp>
-      <p:sp>
-        <p:nvSpPr>
-          <p:cNvPr id="6" name="Text 4"/>
           <p:cNvSpPr/>
           <p:nvPr/>
         </p:nvSpPr>
@@ -3436,7 +4744,7 @@
                 <a:ea typeface="Georgia" pitchFamily="34" charset="-122"/>
                 <a:cs typeface="Georgia" pitchFamily="34" charset="-120"/>
               </a:rPr>
-              <a:t>Core (25 min)</a:t>
+              <a:t>Warm-up (5 min)</a:t>
             </a:r>
             <a:endParaRPr lang="en-US" sz="1800" dirty="0"/>
           </a:p>
@@ -3450,8 +4758,8 @@
         </p:nvSpPr>
         <p:spPr>
           <a:xfrm>
-            <a:off x="634901" y="883593"/>
-            <a:ext cx="8102798" cy="281880"/>
+            <a:off x="406301" y="870942"/>
+            <a:ext cx="8498026" cy="213271"/>
           </a:xfrm>
           <a:prstGeom prst="rect">
             <a:avLst/>
@@ -3463,31 +4771,13 @@
           <a:bodyPr wrap="square" lIns="0" tIns="0" rIns="0" bIns="0" rtlCol="0" anchor="t"/>
           <a:lstStyle/>
           <a:p>
-            <a:pPr algn="l" marL="342900" indent="-342900">
-              <a:lnSpc>
-                <a:spcPts val="1620"/>
-              </a:lnSpc>
-              <a:spcAft>
-                <a:spcPts val="300"/>
-              </a:spcAft>
-              <a:buSzPct val="100000"/>
-              <a:buChar char="•"/>
-            </a:pPr>
-            <a:r>
-              <a:rPr lang="en-US" sz="1200" b="1" dirty="0">
-                <a:solidFill>
-                  <a:srgbClr val="1C2833"/>
-                </a:solidFill>
-                <a:latin typeface="Arial" pitchFamily="34" charset="0"/>
-                <a:ea typeface="Arial" pitchFamily="34" charset="-122"/>
-                <a:cs typeface="Arial" pitchFamily="34" charset="-120"/>
-              </a:rPr>
-              <a:t>Etymology:</a:t>
-            </a:r>
-            <a:pPr algn="l" indent="0" marL="0">
-              <a:lnSpc>
-                <a:spcPts val="1620"/>
-              </a:lnSpc>
+            <a:pPr algn="l" indent="0" marL="0">
+              <a:lnSpc>
+                <a:spcPts val="1680"/>
+              </a:lnSpc>
+              <a:spcBef>
+                <a:spcPts val="300"/>
+              </a:spcBef>
               <a:spcAft>
                 <a:spcPts val="300"/>
               </a:spcAft>
@@ -3502,12 +4792,15 @@
                 <a:ea typeface="Arial" pitchFamily="34" charset="-122"/>
                 <a:cs typeface="Arial" pitchFamily="34" charset="-120"/>
               </a:rPr>
-              <a:t> </a:t>
-            </a:r>
-            <a:pPr algn="l" indent="0" marL="0">
-              <a:lnSpc>
-                <a:spcPts val="1620"/>
-              </a:lnSpc>
+              <a:t>Provocation: </a:t>
+            </a:r>
+            <a:pPr algn="l" indent="0" marL="0">
+              <a:lnSpc>
+                <a:spcPts val="1680"/>
+              </a:lnSpc>
+              <a:spcBef>
+                <a:spcPts val="300"/>
+              </a:spcBef>
               <a:spcAft>
                 <a:spcPts val="300"/>
               </a:spcAft>
@@ -3522,107 +4815,7 @@
                 <a:ea typeface="Arial" pitchFamily="34" charset="-122"/>
                 <a:cs typeface="Arial" pitchFamily="34" charset="-120"/>
               </a:rPr>
-              <a:t>āyu</a:t>
-            </a:r>
-            <a:pPr algn="l" indent="0" marL="0">
-              <a:lnSpc>
-                <a:spcPts val="1620"/>
-              </a:lnSpc>
-              <a:spcAft>
-                <a:spcPts val="300"/>
-              </a:spcAft>
-              <a:buNone/>
-            </a:pPr>
-            <a:r>
-              <a:rPr lang="en-US" sz="1200" dirty="0">
-                <a:solidFill>
-                  <a:srgbClr val="1C2833"/>
-                </a:solidFill>
-                <a:latin typeface="Arial" pitchFamily="34" charset="0"/>
-                <a:ea typeface="Arial" pitchFamily="34" charset="-122"/>
-                <a:cs typeface="Arial" pitchFamily="34" charset="-120"/>
-              </a:rPr>
-              <a:t> (life, vitality) + </a:t>
-            </a:r>
-            <a:pPr algn="l" indent="0" marL="0">
-              <a:lnSpc>
-                <a:spcPts val="1620"/>
-              </a:lnSpc>
-              <a:spcAft>
-                <a:spcPts val="300"/>
-              </a:spcAft>
-              <a:buNone/>
-            </a:pPr>
-            <a:r>
-              <a:rPr lang="en-US" sz="1200" i="1" dirty="0">
-                <a:solidFill>
-                  <a:srgbClr val="1C2833"/>
-                </a:solidFill>
-                <a:latin typeface="Arial" pitchFamily="34" charset="0"/>
-                <a:ea typeface="Arial" pitchFamily="34" charset="-122"/>
-                <a:cs typeface="Arial" pitchFamily="34" charset="-120"/>
-              </a:rPr>
-              <a:t>veda</a:t>
-            </a:r>
-            <a:pPr algn="l" indent="0" marL="0">
-              <a:lnSpc>
-                <a:spcPts val="1620"/>
-              </a:lnSpc>
-              <a:spcAft>
-                <a:spcPts val="300"/>
-              </a:spcAft>
-              <a:buNone/>
-            </a:pPr>
-            <a:r>
-              <a:rPr lang="en-US" sz="1200" dirty="0">
-                <a:solidFill>
-                  <a:srgbClr val="1C2833"/>
-                </a:solidFill>
-                <a:latin typeface="Arial" pitchFamily="34" charset="0"/>
-                <a:ea typeface="Arial" pitchFamily="34" charset="-122"/>
-                <a:cs typeface="Arial" pitchFamily="34" charset="-120"/>
-              </a:rPr>
-              <a:t> (knowledge, science) = </a:t>
-            </a:r>
-            <a:pPr algn="l" indent="0" marL="0">
-              <a:lnSpc>
-                <a:spcPts val="1620"/>
-              </a:lnSpc>
-              <a:spcAft>
-                <a:spcPts val="300"/>
-              </a:spcAft>
-              <a:buNone/>
-            </a:pPr>
-            <a:r>
-              <a:rPr lang="en-US" sz="1200" b="1" dirty="0">
-                <a:solidFill>
-                  <a:srgbClr val="1C2833"/>
-                </a:solidFill>
-                <a:latin typeface="Arial" pitchFamily="34" charset="0"/>
-                <a:ea typeface="Arial" pitchFamily="34" charset="-122"/>
-                <a:cs typeface="Arial" pitchFamily="34" charset="-120"/>
-              </a:rPr>
-              <a:t>"the science of life."</a:t>
-            </a:r>
-            <a:pPr algn="l" indent="0" marL="0">
-              <a:lnSpc>
-                <a:spcPts val="1620"/>
-              </a:lnSpc>
-              <a:spcAft>
-                <a:spcPts val="300"/>
-              </a:spcAft>
-              <a:buNone/>
-            </a:pPr>
-            <a:r>
-              <a:rPr lang="en-US" sz="1200" dirty="0">
-                <a:solidFill>
-                  <a:srgbClr val="1C2833"/>
-                </a:solidFill>
-                <a:latin typeface="Arial" pitchFamily="34" charset="0"/>
-                <a:ea typeface="Arial" pitchFamily="34" charset="-122"/>
-                <a:cs typeface="Arial" pitchFamily="34" charset="-120"/>
-              </a:rPr>
-              <a:t> Not just illness — the entire life.</a:t>
+              <a:t>"If someone said to you 'what is Ayurveda?', what would you say in one sentence?"</a:t>
             </a:r>
             <a:endParaRPr lang="en-US" sz="1200" dirty="0"/>
           </a:p>
@@ -3636,8 +4829,8 @@
         </p:nvSpPr>
         <p:spPr>
           <a:xfrm>
-            <a:off x="634901" y="1266974"/>
-            <a:ext cx="8102798" cy="487561"/>
+            <a:off x="406301" y="1160413"/>
+            <a:ext cx="8498026" cy="213271"/>
           </a:xfrm>
           <a:prstGeom prst="rect">
             <a:avLst/>
@@ -3649,31 +4842,13 @@
           <a:bodyPr wrap="square" lIns="0" tIns="0" rIns="0" bIns="0" rtlCol="0" anchor="t"/>
           <a:lstStyle/>
           <a:p>
-            <a:pPr algn="l" marL="342900" indent="-342900">
-              <a:lnSpc>
-                <a:spcPts val="1620"/>
-              </a:lnSpc>
-              <a:spcAft>
-                <a:spcPts val="300"/>
-              </a:spcAft>
-              <a:buSzPct val="100000"/>
-              <a:buChar char="•"/>
-            </a:pPr>
-            <a:r>
-              <a:rPr lang="en-US" sz="1200" b="1" dirty="0">
-                <a:solidFill>
-                  <a:srgbClr val="1C2833"/>
-                </a:solidFill>
-                <a:latin typeface="Arial" pitchFamily="34" charset="0"/>
-                <a:ea typeface="Arial" pitchFamily="34" charset="-122"/>
-                <a:cs typeface="Arial" pitchFamily="34" charset="-120"/>
-              </a:rPr>
-              <a:t>Swasthya</a:t>
-            </a:r>
-            <a:pPr algn="l" indent="0" marL="0">
-              <a:lnSpc>
-                <a:spcPts val="1620"/>
-              </a:lnSpc>
+            <a:pPr algn="l" indent="0" marL="0">
+              <a:lnSpc>
+                <a:spcPts val="1680"/>
+              </a:lnSpc>
+              <a:spcBef>
+                <a:spcPts val="300"/>
+              </a:spcBef>
               <a:spcAft>
                 <a:spcPts val="300"/>
               </a:spcAft>
@@ -3688,127 +4863,7 @@
                 <a:ea typeface="Arial" pitchFamily="34" charset="-122"/>
                 <a:cs typeface="Arial" pitchFamily="34" charset="-120"/>
               </a:rPr>
-              <a:t> — </a:t>
-            </a:r>
-            <a:pPr algn="l" indent="0" marL="0">
-              <a:lnSpc>
-                <a:spcPts val="1620"/>
-              </a:lnSpc>
-              <a:spcAft>
-                <a:spcPts val="300"/>
-              </a:spcAft>
-              <a:buNone/>
-            </a:pPr>
-            <a:r>
-              <a:rPr lang="en-US" sz="1200" i="1" dirty="0">
-                <a:solidFill>
-                  <a:srgbClr val="1C2833"/>
-                </a:solidFill>
-                <a:latin typeface="Arial" pitchFamily="34" charset="0"/>
-                <a:ea typeface="Arial" pitchFamily="34" charset="-122"/>
-                <a:cs typeface="Arial" pitchFamily="34" charset="-120"/>
-              </a:rPr>
-              <a:t>swa</a:t>
-            </a:r>
-            <a:pPr algn="l" indent="0" marL="0">
-              <a:lnSpc>
-                <a:spcPts val="1620"/>
-              </a:lnSpc>
-              <a:spcAft>
-                <a:spcPts val="300"/>
-              </a:spcAft>
-              <a:buNone/>
-            </a:pPr>
-            <a:r>
-              <a:rPr lang="en-US" sz="1200" dirty="0">
-                <a:solidFill>
-                  <a:srgbClr val="1C2833"/>
-                </a:solidFill>
-                <a:latin typeface="Arial" pitchFamily="34" charset="0"/>
-                <a:ea typeface="Arial" pitchFamily="34" charset="-122"/>
-                <a:cs typeface="Arial" pitchFamily="34" charset="-120"/>
-              </a:rPr>
-              <a:t> (self) + </a:t>
-            </a:r>
-            <a:pPr algn="l" indent="0" marL="0">
-              <a:lnSpc>
-                <a:spcPts val="1620"/>
-              </a:lnSpc>
-              <a:spcAft>
-                <a:spcPts val="300"/>
-              </a:spcAft>
-              <a:buNone/>
-            </a:pPr>
-            <a:r>
-              <a:rPr lang="en-US" sz="1200" i="1" dirty="0">
-                <a:solidFill>
-                  <a:srgbClr val="1C2833"/>
-                </a:solidFill>
-                <a:latin typeface="Arial" pitchFamily="34" charset="0"/>
-                <a:ea typeface="Arial" pitchFamily="34" charset="-122"/>
-                <a:cs typeface="Arial" pitchFamily="34" charset="-120"/>
-              </a:rPr>
-              <a:t>stha</a:t>
-            </a:r>
-            <a:pPr algn="l" indent="0" marL="0">
-              <a:lnSpc>
-                <a:spcPts val="1620"/>
-              </a:lnSpc>
-              <a:spcAft>
-                <a:spcPts val="300"/>
-              </a:spcAft>
-              <a:buNone/>
-            </a:pPr>
-            <a:r>
-              <a:rPr lang="en-US" sz="1200" dirty="0">
-                <a:solidFill>
-                  <a:srgbClr val="1C2833"/>
-                </a:solidFill>
-                <a:latin typeface="Arial" pitchFamily="34" charset="0"/>
-                <a:ea typeface="Arial" pitchFamily="34" charset="-122"/>
-                <a:cs typeface="Arial" pitchFamily="34" charset="-120"/>
-              </a:rPr>
-              <a:t> (established) = </a:t>
-            </a:r>
-            <a:pPr algn="l" indent="0" marL="0">
-              <a:lnSpc>
-                <a:spcPts val="1620"/>
-              </a:lnSpc>
-              <a:spcAft>
-                <a:spcPts val="300"/>
-              </a:spcAft>
-              <a:buNone/>
-            </a:pPr>
-            <a:r>
-              <a:rPr lang="en-US" sz="1200" b="1" dirty="0">
-                <a:solidFill>
-                  <a:srgbClr val="1C2833"/>
-                </a:solidFill>
-                <a:latin typeface="Arial" pitchFamily="34" charset="0"/>
-                <a:ea typeface="Arial" pitchFamily="34" charset="-122"/>
-                <a:cs typeface="Arial" pitchFamily="34" charset="-120"/>
-              </a:rPr>
-              <a:t>"self-established / situated in oneself."</a:t>
-            </a:r>
-            <a:pPr algn="l" indent="0" marL="0">
-              <a:lnSpc>
-                <a:spcPts val="1620"/>
-              </a:lnSpc>
-              <a:spcAft>
-                <a:spcPts val="300"/>
-              </a:spcAft>
-              <a:buNone/>
-            </a:pPr>
-            <a:r>
-              <a:rPr lang="en-US" sz="1200" dirty="0">
-                <a:solidFill>
-                  <a:srgbClr val="1C2833"/>
-                </a:solidFill>
-                <a:latin typeface="Arial" pitchFamily="34" charset="0"/>
-                <a:ea typeface="Arial" pitchFamily="34" charset="-122"/>
-                <a:cs typeface="Arial" pitchFamily="34" charset="-120"/>
-              </a:rPr>
-              <a:t> A working definition of wellbeing: physical + mental + social balance.</a:t>
+              <a:t>Take 3 student answers.</a:t>
             </a:r>
             <a:endParaRPr lang="en-US" sz="1200" dirty="0"/>
           </a:p>
@@ -3822,623 +4877,7 @@
         </p:nvSpPr>
         <p:spPr>
           <a:xfrm>
-            <a:off x="634901" y="1856036"/>
-            <a:ext cx="8102798" cy="281880"/>
-          </a:xfrm>
-          <a:prstGeom prst="rect">
-            <a:avLst/>
-          </a:prstGeom>
-          <a:noFill/>
-          <a:ln/>
-        </p:spPr>
-        <p:txBody>
-          <a:bodyPr wrap="square" lIns="0" tIns="0" rIns="0" bIns="0" rtlCol="0" anchor="t"/>
-          <a:lstStyle/>
-          <a:p>
-            <a:pPr algn="l" marL="342900" indent="-342900">
-              <a:lnSpc>
-                <a:spcPts val="1620"/>
-              </a:lnSpc>
-              <a:spcAft>
-                <a:spcPts val="300"/>
-              </a:spcAft>
-              <a:buSzPct val="100000"/>
-              <a:buChar char="•"/>
-            </a:pPr>
-            <a:r>
-              <a:rPr lang="en-US" sz="1200" b="1" dirty="0">
-                <a:solidFill>
-                  <a:srgbClr val="1C2833"/>
-                </a:solidFill>
-                <a:latin typeface="Arial" pitchFamily="34" charset="0"/>
-                <a:ea typeface="Arial" pitchFamily="34" charset="-122"/>
-                <a:cs typeface="Arial" pitchFamily="34" charset="-120"/>
-              </a:rPr>
-              <a:t>What Ayurveda covers:</a:t>
-            </a:r>
-            <a:endParaRPr lang="en-US" sz="1200" dirty="0"/>
-          </a:p>
-        </p:txBody>
-      </p:sp>
-      <p:sp>
-        <p:nvSpPr>
-          <p:cNvPr id="7" name="Text 5"/>
-          <p:cNvSpPr/>
-          <p:nvPr/>
-        </p:nvSpPr>
-        <p:spPr>
-          <a:xfrm>
-            <a:off x="406301" y="2226766"/>
-            <a:ext cx="8498026" cy="639812"/>
-          </a:xfrm>
-          <a:prstGeom prst="rect">
-            <a:avLst/>
-          </a:prstGeom>
-          <a:noFill/>
-          <a:ln/>
-        </p:spPr>
-        <p:txBody>
-          <a:bodyPr wrap="square" lIns="0" tIns="0" rIns="0" bIns="0" rtlCol="0" anchor="t"/>
-          <a:lstStyle/>
-          <a:p>
-            <a:pPr algn="l" indent="0" marL="0">
-              <a:lnSpc>
-                <a:spcPts val="1680"/>
-              </a:lnSpc>
-              <a:spcBef>
-                <a:spcPts val="300"/>
-              </a:spcBef>
-              <a:spcAft>
-                <a:spcPts val="300"/>
-              </a:spcAft>
-              <a:buNone/>
-            </a:pPr>
-            <a:r>
-              <a:rPr lang="en-US" sz="1200" dirty="0">
-                <a:solidFill>
-                  <a:srgbClr val="1C2833"/>
-                </a:solidFill>
-                <a:latin typeface="Arial" pitchFamily="34" charset="0"/>
-                <a:ea typeface="Arial" pitchFamily="34" charset="-122"/>
-                <a:cs typeface="Arial" pitchFamily="34" charset="-120"/>
-              </a:rPr>
-              <a:t>– Daily routine (</a:t>
-            </a:r>
-            <a:pPr algn="l" indent="0" marL="0">
-              <a:lnSpc>
-                <a:spcPts val="1680"/>
-              </a:lnSpc>
-              <a:spcBef>
-                <a:spcPts val="300"/>
-              </a:spcBef>
-              <a:spcAft>
-                <a:spcPts val="300"/>
-              </a:spcAft>
-              <a:buNone/>
-            </a:pPr>
-            <a:r>
-              <a:rPr lang="en-US" sz="1200" i="1" dirty="0">
-                <a:solidFill>
-                  <a:srgbClr val="1C2833"/>
-                </a:solidFill>
-                <a:latin typeface="Arial" pitchFamily="34" charset="0"/>
-                <a:ea typeface="Arial" pitchFamily="34" charset="-122"/>
-                <a:cs typeface="Arial" pitchFamily="34" charset="-120"/>
-              </a:rPr>
-              <a:t>dinacharya</a:t>
-            </a:r>
-            <a:pPr algn="l" indent="0" marL="0">
-              <a:lnSpc>
-                <a:spcPts val="1680"/>
-              </a:lnSpc>
-              <a:spcBef>
-                <a:spcPts val="300"/>
-              </a:spcBef>
-              <a:spcAft>
-                <a:spcPts val="300"/>
-              </a:spcAft>
-              <a:buNone/>
-            </a:pPr>
-            <a:r>
-              <a:rPr lang="en-US" sz="1200" dirty="0">
-                <a:solidFill>
-                  <a:srgbClr val="1C2833"/>
-                </a:solidFill>
-                <a:latin typeface="Arial" pitchFamily="34" charset="0"/>
-                <a:ea typeface="Arial" pitchFamily="34" charset="-122"/>
-                <a:cs typeface="Arial" pitchFamily="34" charset="-120"/>
-              </a:rPr>
-              <a:t>) – Seasonal routine (</a:t>
-            </a:r>
-            <a:pPr algn="l" indent="0" marL="0">
-              <a:lnSpc>
-                <a:spcPts val="1680"/>
-              </a:lnSpc>
-              <a:spcBef>
-                <a:spcPts val="300"/>
-              </a:spcBef>
-              <a:spcAft>
-                <a:spcPts val="300"/>
-              </a:spcAft>
-              <a:buNone/>
-            </a:pPr>
-            <a:r>
-              <a:rPr lang="en-US" sz="1200" i="1" dirty="0">
-                <a:solidFill>
-                  <a:srgbClr val="1C2833"/>
-                </a:solidFill>
-                <a:latin typeface="Arial" pitchFamily="34" charset="0"/>
-                <a:ea typeface="Arial" pitchFamily="34" charset="-122"/>
-                <a:cs typeface="Arial" pitchFamily="34" charset="-120"/>
-              </a:rPr>
-              <a:t>ritucharya</a:t>
-            </a:r>
-            <a:pPr algn="l" indent="0" marL="0">
-              <a:lnSpc>
-                <a:spcPts val="1680"/>
-              </a:lnSpc>
-              <a:spcBef>
-                <a:spcPts val="300"/>
-              </a:spcBef>
-              <a:spcAft>
-                <a:spcPts val="300"/>
-              </a:spcAft>
-              <a:buNone/>
-            </a:pPr>
-            <a:r>
-              <a:rPr lang="en-US" sz="1200" dirty="0">
-                <a:solidFill>
-                  <a:srgbClr val="1C2833"/>
-                </a:solidFill>
-                <a:latin typeface="Arial" pitchFamily="34" charset="0"/>
-                <a:ea typeface="Arial" pitchFamily="34" charset="-122"/>
-                <a:cs typeface="Arial" pitchFamily="34" charset="-120"/>
-              </a:rPr>
-              <a:t>) – Food (</a:t>
-            </a:r>
-            <a:pPr algn="l" indent="0" marL="0">
-              <a:lnSpc>
-                <a:spcPts val="1680"/>
-              </a:lnSpc>
-              <a:spcBef>
-                <a:spcPts val="300"/>
-              </a:spcBef>
-              <a:spcAft>
-                <a:spcPts val="300"/>
-              </a:spcAft>
-              <a:buNone/>
-            </a:pPr>
-            <a:r>
-              <a:rPr lang="en-US" sz="1200" i="1" dirty="0">
-                <a:solidFill>
-                  <a:srgbClr val="1C2833"/>
-                </a:solidFill>
-                <a:latin typeface="Arial" pitchFamily="34" charset="0"/>
-                <a:ea typeface="Arial" pitchFamily="34" charset="-122"/>
-                <a:cs typeface="Arial" pitchFamily="34" charset="-120"/>
-              </a:rPr>
-              <a:t>ahāra</a:t>
-            </a:r>
-            <a:pPr algn="l" indent="0" marL="0">
-              <a:lnSpc>
-                <a:spcPts val="1680"/>
-              </a:lnSpc>
-              <a:spcBef>
-                <a:spcPts val="300"/>
-              </a:spcBef>
-              <a:spcAft>
-                <a:spcPts val="300"/>
-              </a:spcAft>
-              <a:buNone/>
-            </a:pPr>
-            <a:r>
-              <a:rPr lang="en-US" sz="1200" dirty="0">
-                <a:solidFill>
-                  <a:srgbClr val="1C2833"/>
-                </a:solidFill>
-                <a:latin typeface="Arial" pitchFamily="34" charset="0"/>
-                <a:ea typeface="Arial" pitchFamily="34" charset="-122"/>
-                <a:cs typeface="Arial" pitchFamily="34" charset="-120"/>
-              </a:rPr>
-              <a:t>) — what, when, how to eat – Recreation (</a:t>
-            </a:r>
-            <a:pPr algn="l" indent="0" marL="0">
-              <a:lnSpc>
-                <a:spcPts val="1680"/>
-              </a:lnSpc>
-              <a:spcBef>
-                <a:spcPts val="300"/>
-              </a:spcBef>
-              <a:spcAft>
-                <a:spcPts val="300"/>
-              </a:spcAft>
-              <a:buNone/>
-            </a:pPr>
-            <a:r>
-              <a:rPr lang="en-US" sz="1200" i="1" dirty="0">
-                <a:solidFill>
-                  <a:srgbClr val="1C2833"/>
-                </a:solidFill>
-                <a:latin typeface="Arial" pitchFamily="34" charset="0"/>
-                <a:ea typeface="Arial" pitchFamily="34" charset="-122"/>
-                <a:cs typeface="Arial" pitchFamily="34" charset="-120"/>
-              </a:rPr>
-              <a:t>vihāra</a:t>
-            </a:r>
-            <a:pPr algn="l" indent="0" marL="0">
-              <a:lnSpc>
-                <a:spcPts val="1680"/>
-              </a:lnSpc>
-              <a:spcBef>
-                <a:spcPts val="300"/>
-              </a:spcBef>
-              <a:spcAft>
-                <a:spcPts val="300"/>
-              </a:spcAft>
-              <a:buNone/>
-            </a:pPr>
-            <a:r>
-              <a:rPr lang="en-US" sz="1200" dirty="0">
-                <a:solidFill>
-                  <a:srgbClr val="1C2833"/>
-                </a:solidFill>
-                <a:latin typeface="Arial" pitchFamily="34" charset="0"/>
-                <a:ea typeface="Arial" pitchFamily="34" charset="-122"/>
-                <a:cs typeface="Arial" pitchFamily="34" charset="-120"/>
-              </a:rPr>
-              <a:t>) — exercise, sleep, social life – Herbal medicines (</a:t>
-            </a:r>
-            <a:pPr algn="l" indent="0" marL="0">
-              <a:lnSpc>
-                <a:spcPts val="1680"/>
-              </a:lnSpc>
-              <a:spcBef>
-                <a:spcPts val="300"/>
-              </a:spcBef>
-              <a:spcAft>
-                <a:spcPts val="300"/>
-              </a:spcAft>
-              <a:buNone/>
-            </a:pPr>
-            <a:r>
-              <a:rPr lang="en-US" sz="1200" i="1" dirty="0">
-                <a:solidFill>
-                  <a:srgbClr val="1C2833"/>
-                </a:solidFill>
-                <a:latin typeface="Arial" pitchFamily="34" charset="0"/>
-                <a:ea typeface="Arial" pitchFamily="34" charset="-122"/>
-                <a:cs typeface="Arial" pitchFamily="34" charset="-120"/>
-              </a:rPr>
-              <a:t>aushadhi</a:t>
-            </a:r>
-            <a:pPr algn="l" indent="0" marL="0">
-              <a:lnSpc>
-                <a:spcPts val="1680"/>
-              </a:lnSpc>
-              <a:spcBef>
-                <a:spcPts val="300"/>
-              </a:spcBef>
-              <a:spcAft>
-                <a:spcPts val="300"/>
-              </a:spcAft>
-              <a:buNone/>
-            </a:pPr>
-            <a:r>
-              <a:rPr lang="en-US" sz="1200" dirty="0">
-                <a:solidFill>
-                  <a:srgbClr val="1C2833"/>
-                </a:solidFill>
-                <a:latin typeface="Arial" pitchFamily="34" charset="0"/>
-                <a:ea typeface="Arial" pitchFamily="34" charset="-122"/>
-                <a:cs typeface="Arial" pitchFamily="34" charset="-120"/>
-              </a:rPr>
-              <a:t>) – Surgery (</a:t>
-            </a:r>
-            <a:pPr algn="l" indent="0" marL="0">
-              <a:lnSpc>
-                <a:spcPts val="1680"/>
-              </a:lnSpc>
-              <a:spcBef>
-                <a:spcPts val="300"/>
-              </a:spcBef>
-              <a:spcAft>
-                <a:spcPts val="300"/>
-              </a:spcAft>
-              <a:buNone/>
-            </a:pPr>
-            <a:r>
-              <a:rPr lang="en-US" sz="1200" i="1" dirty="0">
-                <a:solidFill>
-                  <a:srgbClr val="1C2833"/>
-                </a:solidFill>
-                <a:latin typeface="Arial" pitchFamily="34" charset="0"/>
-                <a:ea typeface="Arial" pitchFamily="34" charset="-122"/>
-                <a:cs typeface="Arial" pitchFamily="34" charset="-120"/>
-              </a:rPr>
-              <a:t>śalya-tantra</a:t>
-            </a:r>
-            <a:pPr algn="l" indent="0" marL="0">
-              <a:lnSpc>
-                <a:spcPts val="1680"/>
-              </a:lnSpc>
-              <a:spcBef>
-                <a:spcPts val="300"/>
-              </a:spcBef>
-              <a:spcAft>
-                <a:spcPts val="300"/>
-              </a:spcAft>
-              <a:buNone/>
-            </a:pPr>
-            <a:r>
-              <a:rPr lang="en-US" sz="1200" dirty="0">
-                <a:solidFill>
-                  <a:srgbClr val="1C2833"/>
-                </a:solidFill>
-                <a:latin typeface="Arial" pitchFamily="34" charset="0"/>
-                <a:ea typeface="Arial" pitchFamily="34" charset="-122"/>
-                <a:cs typeface="Arial" pitchFamily="34" charset="-120"/>
-              </a:rPr>
-              <a:t>) — historically, e.g. Sushruta – 8 branches total (the </a:t>
-            </a:r>
-            <a:pPr algn="l" indent="0" marL="0">
-              <a:lnSpc>
-                <a:spcPts val="1680"/>
-              </a:lnSpc>
-              <a:spcBef>
-                <a:spcPts val="300"/>
-              </a:spcBef>
-              <a:spcAft>
-                <a:spcPts val="300"/>
-              </a:spcAft>
-              <a:buNone/>
-            </a:pPr>
-            <a:r>
-              <a:rPr lang="en-US" sz="1200" i="1" dirty="0">
-                <a:solidFill>
-                  <a:srgbClr val="1C2833"/>
-                </a:solidFill>
-                <a:latin typeface="Arial" pitchFamily="34" charset="0"/>
-                <a:ea typeface="Arial" pitchFamily="34" charset="-122"/>
-                <a:cs typeface="Arial" pitchFamily="34" charset="-120"/>
-              </a:rPr>
-              <a:t>aṣṭāṅga</a:t>
-            </a:r>
-            <a:pPr algn="l" indent="0" marL="0">
-              <a:lnSpc>
-                <a:spcPts val="1680"/>
-              </a:lnSpc>
-              <a:spcBef>
-                <a:spcPts val="300"/>
-              </a:spcBef>
-              <a:spcAft>
-                <a:spcPts val="300"/>
-              </a:spcAft>
-              <a:buNone/>
-            </a:pPr>
-            <a:r>
-              <a:rPr lang="en-US" sz="1200" dirty="0">
-                <a:solidFill>
-                  <a:srgbClr val="1C2833"/>
-                </a:solidFill>
-                <a:latin typeface="Arial" pitchFamily="34" charset="0"/>
-                <a:ea typeface="Arial" pitchFamily="34" charset="-122"/>
-                <a:cs typeface="Arial" pitchFamily="34" charset="-120"/>
-              </a:rPr>
-              <a:t> of Ayurveda)</a:t>
-            </a:r>
-            <a:endParaRPr lang="en-US" sz="1200" dirty="0"/>
-          </a:p>
-        </p:txBody>
-      </p:sp>
-      <p:sp>
-        <p:nvSpPr>
-          <p:cNvPr id="8" name="Text 6"/>
-          <p:cNvSpPr/>
-          <p:nvPr/>
-        </p:nvSpPr>
-        <p:spPr>
-          <a:xfrm>
-            <a:off x="634901" y="2955429"/>
-            <a:ext cx="8102798" cy="281880"/>
-          </a:xfrm>
-          <a:prstGeom prst="rect">
-            <a:avLst/>
-          </a:prstGeom>
-          <a:noFill/>
-          <a:ln/>
-        </p:spPr>
-        <p:txBody>
-          <a:bodyPr wrap="square" lIns="0" tIns="0" rIns="0" bIns="0" rtlCol="0" anchor="t"/>
-          <a:lstStyle/>
-          <a:p>
-            <a:pPr algn="l" marL="342900" indent="-342900">
-              <a:lnSpc>
-                <a:spcPts val="1620"/>
-              </a:lnSpc>
-              <a:spcAft>
-                <a:spcPts val="300"/>
-              </a:spcAft>
-              <a:buSzPct val="100000"/>
-              <a:buChar char="•"/>
-            </a:pPr>
-            <a:r>
-              <a:rPr lang="en-US" sz="1200" b="1" dirty="0">
-                <a:solidFill>
-                  <a:srgbClr val="1C2833"/>
-                </a:solidFill>
-                <a:latin typeface="Arial" pitchFamily="34" charset="0"/>
-                <a:ea typeface="Arial" pitchFamily="34" charset="-122"/>
-                <a:cs typeface="Arial" pitchFamily="34" charset="-120"/>
-              </a:rPr>
-              <a:t>What Ayurveda does NOT cover well:</a:t>
-            </a:r>
-            <a:endParaRPr lang="en-US" sz="1200" dirty="0"/>
-          </a:p>
-        </p:txBody>
-      </p:sp>
-      <p:sp>
-        <p:nvSpPr>
-          <p:cNvPr id="9" name="Text 7"/>
-          <p:cNvSpPr/>
-          <p:nvPr/>
-        </p:nvSpPr>
-        <p:spPr>
-          <a:xfrm>
-            <a:off x="406301" y="3326160"/>
-            <a:ext cx="8498026" cy="426541"/>
-          </a:xfrm>
-          <a:prstGeom prst="rect">
-            <a:avLst/>
-          </a:prstGeom>
-          <a:noFill/>
-          <a:ln/>
-        </p:spPr>
-        <p:txBody>
-          <a:bodyPr wrap="square" lIns="0" tIns="0" rIns="0" bIns="0" rtlCol="0" anchor="t"/>
-          <a:lstStyle/>
-          <a:p>
-            <a:pPr algn="l" indent="0" marL="0">
-              <a:lnSpc>
-                <a:spcPts val="1680"/>
-              </a:lnSpc>
-              <a:spcBef>
-                <a:spcPts val="300"/>
-              </a:spcBef>
-              <a:spcAft>
-                <a:spcPts val="300"/>
-              </a:spcAft>
-              <a:buNone/>
-            </a:pPr>
-            <a:r>
-              <a:rPr lang="en-US" sz="1200" dirty="0">
-                <a:solidFill>
-                  <a:srgbClr val="1C2833"/>
-                </a:solidFill>
-                <a:latin typeface="Arial" pitchFamily="34" charset="0"/>
-                <a:ea typeface="Arial" pitchFamily="34" charset="-122"/>
-                <a:cs typeface="Arial" pitchFamily="34" charset="-120"/>
-              </a:rPr>
-              <a:t>– Acute infections requiring antibiotics    – Emergency surgery    – Genetic conditions requiring modern diagnostics    – Mental health requiring specialised psychiatric care</a:t>
-            </a:r>
-            <a:endParaRPr lang="en-US" sz="1200" dirty="0"/>
-          </a:p>
-        </p:txBody>
-      </p:sp>
-      <p:sp>
-        <p:nvSpPr>
-          <p:cNvPr id="10" name="Text 8"/>
-          <p:cNvSpPr/>
-          <p:nvPr/>
-        </p:nvSpPr>
-        <p:spPr>
-          <a:xfrm>
-            <a:off x="634901" y="3841552"/>
-            <a:ext cx="8102798" cy="487561"/>
-          </a:xfrm>
-          <a:prstGeom prst="rect">
-            <a:avLst/>
-          </a:prstGeom>
-          <a:noFill/>
-          <a:ln/>
-        </p:spPr>
-        <p:txBody>
-          <a:bodyPr wrap="square" lIns="0" tIns="0" rIns="0" bIns="0" rtlCol="0" anchor="t"/>
-          <a:lstStyle/>
-          <a:p>
-            <a:pPr algn="l" marL="342900" indent="-342900">
-              <a:lnSpc>
-                <a:spcPts val="1620"/>
-              </a:lnSpc>
-              <a:spcAft>
-                <a:spcPts val="300"/>
-              </a:spcAft>
-              <a:buSzPct val="100000"/>
-              <a:buChar char="•"/>
-            </a:pPr>
-            <a:r>
-              <a:rPr lang="en-US" sz="1200" b="1" dirty="0">
-                <a:solidFill>
-                  <a:srgbClr val="1C2833"/>
-                </a:solidFill>
-                <a:latin typeface="Arial" pitchFamily="34" charset="0"/>
-                <a:ea typeface="Arial" pitchFamily="34" charset="-122"/>
-                <a:cs typeface="Arial" pitchFamily="34" charset="-120"/>
-              </a:rPr>
-              <a:t>The honest framing:</a:t>
-            </a:r>
-            <a:pPr algn="l" indent="0" marL="0">
-              <a:lnSpc>
-                <a:spcPts val="1620"/>
-              </a:lnSpc>
-              <a:spcAft>
-                <a:spcPts val="300"/>
-              </a:spcAft>
-              <a:buNone/>
-            </a:pPr>
-            <a:r>
-              <a:rPr lang="en-US" sz="1200" dirty="0">
-                <a:solidFill>
-                  <a:srgbClr val="1C2833"/>
-                </a:solidFill>
-                <a:latin typeface="Arial" pitchFamily="34" charset="0"/>
-                <a:ea typeface="Arial" pitchFamily="34" charset="-122"/>
-                <a:cs typeface="Arial" pitchFamily="34" charset="-120"/>
-              </a:rPr>
-              <a:t> Ayurveda + modern medicine are </a:t>
-            </a:r>
-            <a:pPr algn="l" indent="0" marL="0">
-              <a:lnSpc>
-                <a:spcPts val="1620"/>
-              </a:lnSpc>
-              <a:spcAft>
-                <a:spcPts val="300"/>
-              </a:spcAft>
-              <a:buNone/>
-            </a:pPr>
-            <a:r>
-              <a:rPr lang="en-US" sz="1200" i="1" dirty="0">
-                <a:solidFill>
-                  <a:srgbClr val="1C2833"/>
-                </a:solidFill>
-                <a:latin typeface="Arial" pitchFamily="34" charset="0"/>
-                <a:ea typeface="Arial" pitchFamily="34" charset="-122"/>
-                <a:cs typeface="Arial" pitchFamily="34" charset="-120"/>
-              </a:rPr>
-              <a:t>partners</a:t>
-            </a:r>
-            <a:pPr algn="l" indent="0" marL="0">
-              <a:lnSpc>
-                <a:spcPts val="1620"/>
-              </a:lnSpc>
-              <a:spcAft>
-                <a:spcPts val="300"/>
-              </a:spcAft>
-              <a:buNone/>
-            </a:pPr>
-            <a:r>
-              <a:rPr lang="en-US" sz="1200" dirty="0">
-                <a:solidFill>
-                  <a:srgbClr val="1C2833"/>
-                </a:solidFill>
-                <a:latin typeface="Arial" pitchFamily="34" charset="0"/>
-                <a:ea typeface="Arial" pitchFamily="34" charset="-122"/>
-                <a:cs typeface="Arial" pitchFamily="34" charset="-120"/>
-              </a:rPr>
-              <a:t>, not rivals. Each has a domain. Don't substitute one for the other.</a:t>
-            </a:r>
-            <a:endParaRPr lang="en-US" sz="1200" dirty="0"/>
-          </a:p>
-        </p:txBody>
-      </p:sp>
-      <p:sp>
-        <p:nvSpPr>
-          <p:cNvPr id="11" name="Text 9"/>
-          <p:cNvSpPr/>
-          <p:nvPr/>
-        </p:nvSpPr>
-        <p:spPr>
-          <a:xfrm>
-            <a:off x="406301" y="4494163"/>
+            <a:off x="406301" y="4434929"/>
             <a:ext cx="8498026" cy="213271"/>
           </a:xfrm>
           <a:prstGeom prst="rect">
@@ -4582,7 +5021,7 @@
                 <a:ea typeface="Georgia" pitchFamily="34" charset="-122"/>
                 <a:cs typeface="Georgia" pitchFamily="34" charset="-120"/>
               </a:rPr>
-              <a:t>Activity (10 min) — Map a day</a:t>
+              <a:t>Core (25 min)</a:t>
             </a:r>
             <a:endParaRPr lang="en-US" sz="1800" dirty="0"/>
           </a:p>
@@ -4596,8 +5035,8 @@
         </p:nvSpPr>
         <p:spPr>
           <a:xfrm>
-            <a:off x="406301" y="870942"/>
-            <a:ext cx="8498026" cy="213271"/>
+            <a:off x="634901" y="883593"/>
+            <a:ext cx="8102798" cy="281880"/>
           </a:xfrm>
           <a:prstGeom prst="rect">
             <a:avLst/>
@@ -4609,13 +5048,31 @@
           <a:bodyPr wrap="square" lIns="0" tIns="0" rIns="0" bIns="0" rtlCol="0" anchor="t"/>
           <a:lstStyle/>
           <a:p>
-            <a:pPr algn="l" indent="0" marL="0">
-              <a:lnSpc>
-                <a:spcPts val="1680"/>
-              </a:lnSpc>
-              <a:spcBef>
-                <a:spcPts val="300"/>
-              </a:spcBef>
+            <a:pPr algn="l" marL="342900" indent="-342900">
+              <a:lnSpc>
+                <a:spcPts val="1620"/>
+              </a:lnSpc>
+              <a:spcAft>
+                <a:spcPts val="300"/>
+              </a:spcAft>
+              <a:buSzPct val="100000"/>
+              <a:buChar char="•"/>
+            </a:pPr>
+            <a:r>
+              <a:rPr lang="en-US" sz="1200" b="1" dirty="0">
+                <a:solidFill>
+                  <a:srgbClr val="1C2833"/>
+                </a:solidFill>
+                <a:latin typeface="Arial" pitchFamily="34" charset="0"/>
+                <a:ea typeface="Arial" pitchFamily="34" charset="-122"/>
+                <a:cs typeface="Arial" pitchFamily="34" charset="-120"/>
+              </a:rPr>
+              <a:t>Etymology:</a:t>
+            </a:r>
+            <a:pPr algn="l" indent="0" marL="0">
+              <a:lnSpc>
+                <a:spcPts val="1620"/>
+              </a:lnSpc>
               <a:spcAft>
                 <a:spcPts val="300"/>
               </a:spcAft>
@@ -4630,15 +5087,12 @@
                 <a:ea typeface="Arial" pitchFamily="34" charset="-122"/>
                 <a:cs typeface="Arial" pitchFamily="34" charset="-120"/>
               </a:rPr>
-              <a:t>Students fold paper in 4. Label each quadrant: </a:t>
-            </a:r>
-            <a:pPr algn="l" indent="0" marL="0">
-              <a:lnSpc>
-                <a:spcPts val="1680"/>
-              </a:lnSpc>
-              <a:spcBef>
-                <a:spcPts val="300"/>
-              </a:spcBef>
+              <a:t> </a:t>
+            </a:r>
+            <a:pPr algn="l" indent="0" marL="0">
+              <a:lnSpc>
+                <a:spcPts val="1620"/>
+              </a:lnSpc>
               <a:spcAft>
                 <a:spcPts val="300"/>
               </a:spcAft>
@@ -4653,15 +5107,12 @@
                 <a:ea typeface="Arial" pitchFamily="34" charset="-122"/>
                 <a:cs typeface="Arial" pitchFamily="34" charset="-120"/>
               </a:rPr>
-              <a:t>Sleep, Food, Exercise, Mood</a:t>
-            </a:r>
-            <a:pPr algn="l" indent="0" marL="0">
-              <a:lnSpc>
-                <a:spcPts val="1680"/>
-              </a:lnSpc>
-              <a:spcBef>
-                <a:spcPts val="300"/>
-              </a:spcBef>
+              <a:t>āyu</a:t>
+            </a:r>
+            <a:pPr algn="l" indent="0" marL="0">
+              <a:lnSpc>
+                <a:spcPts val="1620"/>
+              </a:lnSpc>
               <a:spcAft>
                 <a:spcPts val="300"/>
               </a:spcAft>
@@ -4676,7 +5127,87 @@
                 <a:ea typeface="Arial" pitchFamily="34" charset="-122"/>
                 <a:cs typeface="Arial" pitchFamily="34" charset="-120"/>
               </a:rPr>
-              <a:t>. In each, write what they did yesterday.</a:t>
+              <a:t> (life, vitality) + </a:t>
+            </a:r>
+            <a:pPr algn="l" indent="0" marL="0">
+              <a:lnSpc>
+                <a:spcPts val="1620"/>
+              </a:lnSpc>
+              <a:spcAft>
+                <a:spcPts val="300"/>
+              </a:spcAft>
+              <a:buNone/>
+            </a:pPr>
+            <a:r>
+              <a:rPr lang="en-US" sz="1200" i="1" dirty="0">
+                <a:solidFill>
+                  <a:srgbClr val="1C2833"/>
+                </a:solidFill>
+                <a:latin typeface="Arial" pitchFamily="34" charset="0"/>
+                <a:ea typeface="Arial" pitchFamily="34" charset="-122"/>
+                <a:cs typeface="Arial" pitchFamily="34" charset="-120"/>
+              </a:rPr>
+              <a:t>veda</a:t>
+            </a:r>
+            <a:pPr algn="l" indent="0" marL="0">
+              <a:lnSpc>
+                <a:spcPts val="1620"/>
+              </a:lnSpc>
+              <a:spcAft>
+                <a:spcPts val="300"/>
+              </a:spcAft>
+              <a:buNone/>
+            </a:pPr>
+            <a:r>
+              <a:rPr lang="en-US" sz="1200" dirty="0">
+                <a:solidFill>
+                  <a:srgbClr val="1C2833"/>
+                </a:solidFill>
+                <a:latin typeface="Arial" pitchFamily="34" charset="0"/>
+                <a:ea typeface="Arial" pitchFamily="34" charset="-122"/>
+                <a:cs typeface="Arial" pitchFamily="34" charset="-120"/>
+              </a:rPr>
+              <a:t> (knowledge, science) = </a:t>
+            </a:r>
+            <a:pPr algn="l" indent="0" marL="0">
+              <a:lnSpc>
+                <a:spcPts val="1620"/>
+              </a:lnSpc>
+              <a:spcAft>
+                <a:spcPts val="300"/>
+              </a:spcAft>
+              <a:buNone/>
+            </a:pPr>
+            <a:r>
+              <a:rPr lang="en-US" sz="1200" b="1" dirty="0">
+                <a:solidFill>
+                  <a:srgbClr val="1C2833"/>
+                </a:solidFill>
+                <a:latin typeface="Arial" pitchFamily="34" charset="0"/>
+                <a:ea typeface="Arial" pitchFamily="34" charset="-122"/>
+                <a:cs typeface="Arial" pitchFamily="34" charset="-120"/>
+              </a:rPr>
+              <a:t>"the science of life."</a:t>
+            </a:r>
+            <a:pPr algn="l" indent="0" marL="0">
+              <a:lnSpc>
+                <a:spcPts val="1620"/>
+              </a:lnSpc>
+              <a:spcAft>
+                <a:spcPts val="300"/>
+              </a:spcAft>
+              <a:buNone/>
+            </a:pPr>
+            <a:r>
+              <a:rPr lang="en-US" sz="1200" dirty="0">
+                <a:solidFill>
+                  <a:srgbClr val="1C2833"/>
+                </a:solidFill>
+                <a:latin typeface="Arial" pitchFamily="34" charset="0"/>
+                <a:ea typeface="Arial" pitchFamily="34" charset="-122"/>
+                <a:cs typeface="Arial" pitchFamily="34" charset="-120"/>
+              </a:rPr>
+              <a:t> Not just illness — the entire life.</a:t>
             </a:r>
             <a:endParaRPr lang="en-US" sz="1200" dirty="0"/>
           </a:p>
@@ -4690,8 +5221,8 @@
         </p:nvSpPr>
         <p:spPr>
           <a:xfrm>
-            <a:off x="406301" y="1160413"/>
-            <a:ext cx="8498026" cy="213271"/>
+            <a:off x="634901" y="1266974"/>
+            <a:ext cx="8102798" cy="487561"/>
           </a:xfrm>
           <a:prstGeom prst="rect">
             <a:avLst/>
@@ -4703,13 +5234,31 @@
           <a:bodyPr wrap="square" lIns="0" tIns="0" rIns="0" bIns="0" rtlCol="0" anchor="t"/>
           <a:lstStyle/>
           <a:p>
-            <a:pPr algn="l" indent="0" marL="0">
-              <a:lnSpc>
-                <a:spcPts val="1680"/>
-              </a:lnSpc>
-              <a:spcBef>
-                <a:spcPts val="300"/>
-              </a:spcBef>
+            <a:pPr algn="l" marL="342900" indent="-342900">
+              <a:lnSpc>
+                <a:spcPts val="1620"/>
+              </a:lnSpc>
+              <a:spcAft>
+                <a:spcPts val="300"/>
+              </a:spcAft>
+              <a:buSzPct val="100000"/>
+              <a:buChar char="•"/>
+            </a:pPr>
+            <a:r>
+              <a:rPr lang="en-US" sz="1200" b="1" dirty="0">
+                <a:solidFill>
+                  <a:srgbClr val="1C2833"/>
+                </a:solidFill>
+                <a:latin typeface="Arial" pitchFamily="34" charset="0"/>
+                <a:ea typeface="Arial" pitchFamily="34" charset="-122"/>
+                <a:cs typeface="Arial" pitchFamily="34" charset="-120"/>
+              </a:rPr>
+              <a:t>Swasthya</a:t>
+            </a:r>
+            <a:pPr algn="l" indent="0" marL="0">
+              <a:lnSpc>
+                <a:spcPts val="1620"/>
+              </a:lnSpc>
               <a:spcAft>
                 <a:spcPts val="300"/>
               </a:spcAft>
@@ -4724,15 +5273,12 @@
                 <a:ea typeface="Arial" pitchFamily="34" charset="-122"/>
                 <a:cs typeface="Arial" pitchFamily="34" charset="-120"/>
               </a:rPr>
-              <a:t>Note: </a:t>
-            </a:r>
-            <a:pPr algn="l" indent="0" marL="0">
-              <a:lnSpc>
-                <a:spcPts val="1680"/>
-              </a:lnSpc>
-              <a:spcBef>
-                <a:spcPts val="300"/>
-              </a:spcBef>
+              <a:t> — </a:t>
+            </a:r>
+            <a:pPr algn="l" indent="0" marL="0">
+              <a:lnSpc>
+                <a:spcPts val="1620"/>
+              </a:lnSpc>
               <a:spcAft>
                 <a:spcPts val="300"/>
               </a:spcAft>
@@ -4747,7 +5293,107 @@
                 <a:ea typeface="Arial" pitchFamily="34" charset="-122"/>
                 <a:cs typeface="Arial" pitchFamily="34" charset="-120"/>
               </a:rPr>
-              <a:t>"This is your raw data. Over the next 2 weeks we'll learn the Ayurvedic framework to make sense of it."</a:t>
+              <a:t>swa</a:t>
+            </a:r>
+            <a:pPr algn="l" indent="0" marL="0">
+              <a:lnSpc>
+                <a:spcPts val="1620"/>
+              </a:lnSpc>
+              <a:spcAft>
+                <a:spcPts val="300"/>
+              </a:spcAft>
+              <a:buNone/>
+            </a:pPr>
+            <a:r>
+              <a:rPr lang="en-US" sz="1200" dirty="0">
+                <a:solidFill>
+                  <a:srgbClr val="1C2833"/>
+                </a:solidFill>
+                <a:latin typeface="Arial" pitchFamily="34" charset="0"/>
+                <a:ea typeface="Arial" pitchFamily="34" charset="-122"/>
+                <a:cs typeface="Arial" pitchFamily="34" charset="-120"/>
+              </a:rPr>
+              <a:t> (self) + </a:t>
+            </a:r>
+            <a:pPr algn="l" indent="0" marL="0">
+              <a:lnSpc>
+                <a:spcPts val="1620"/>
+              </a:lnSpc>
+              <a:spcAft>
+                <a:spcPts val="300"/>
+              </a:spcAft>
+              <a:buNone/>
+            </a:pPr>
+            <a:r>
+              <a:rPr lang="en-US" sz="1200" i="1" dirty="0">
+                <a:solidFill>
+                  <a:srgbClr val="1C2833"/>
+                </a:solidFill>
+                <a:latin typeface="Arial" pitchFamily="34" charset="0"/>
+                <a:ea typeface="Arial" pitchFamily="34" charset="-122"/>
+                <a:cs typeface="Arial" pitchFamily="34" charset="-120"/>
+              </a:rPr>
+              <a:t>stha</a:t>
+            </a:r>
+            <a:pPr algn="l" indent="0" marL="0">
+              <a:lnSpc>
+                <a:spcPts val="1620"/>
+              </a:lnSpc>
+              <a:spcAft>
+                <a:spcPts val="300"/>
+              </a:spcAft>
+              <a:buNone/>
+            </a:pPr>
+            <a:r>
+              <a:rPr lang="en-US" sz="1200" dirty="0">
+                <a:solidFill>
+                  <a:srgbClr val="1C2833"/>
+                </a:solidFill>
+                <a:latin typeface="Arial" pitchFamily="34" charset="0"/>
+                <a:ea typeface="Arial" pitchFamily="34" charset="-122"/>
+                <a:cs typeface="Arial" pitchFamily="34" charset="-120"/>
+              </a:rPr>
+              <a:t> (established) = </a:t>
+            </a:r>
+            <a:pPr algn="l" indent="0" marL="0">
+              <a:lnSpc>
+                <a:spcPts val="1620"/>
+              </a:lnSpc>
+              <a:spcAft>
+                <a:spcPts val="300"/>
+              </a:spcAft>
+              <a:buNone/>
+            </a:pPr>
+            <a:r>
+              <a:rPr lang="en-US" sz="1200" b="1" dirty="0">
+                <a:solidFill>
+                  <a:srgbClr val="1C2833"/>
+                </a:solidFill>
+                <a:latin typeface="Arial" pitchFamily="34" charset="0"/>
+                <a:ea typeface="Arial" pitchFamily="34" charset="-122"/>
+                <a:cs typeface="Arial" pitchFamily="34" charset="-120"/>
+              </a:rPr>
+              <a:t>"self-established / situated in oneself."</a:t>
+            </a:r>
+            <a:pPr algn="l" indent="0" marL="0">
+              <a:lnSpc>
+                <a:spcPts val="1620"/>
+              </a:lnSpc>
+              <a:spcAft>
+                <a:spcPts val="300"/>
+              </a:spcAft>
+              <a:buNone/>
+            </a:pPr>
+            <a:r>
+              <a:rPr lang="en-US" sz="1200" dirty="0">
+                <a:solidFill>
+                  <a:srgbClr val="1C2833"/>
+                </a:solidFill>
+                <a:latin typeface="Arial" pitchFamily="34" charset="0"/>
+                <a:ea typeface="Arial" pitchFamily="34" charset="-122"/>
+                <a:cs typeface="Arial" pitchFamily="34" charset="-120"/>
+              </a:rPr>
+              <a:t> A working definition of wellbeing: physical + mental + social balance.</a:t>
             </a:r>
             <a:endParaRPr lang="en-US" sz="1200" dirty="0"/>
           </a:p>
@@ -4905,7 +5551,7 @@
                 <a:ea typeface="Georgia" pitchFamily="34" charset="-122"/>
                 <a:cs typeface="Georgia" pitchFamily="34" charset="-120"/>
               </a:rPr>
-              <a:t>Wrap-up (5 min)</a:t>
+              <a:t>Core (25 min) (cont.)</a:t>
             </a:r>
             <a:endParaRPr lang="en-US" sz="1800" dirty="0"/>
           </a:p>
@@ -4919,8 +5565,8 @@
         </p:nvSpPr>
         <p:spPr>
           <a:xfrm>
-            <a:off x="406301" y="870942"/>
-            <a:ext cx="8498026" cy="213271"/>
+            <a:off x="634901" y="883593"/>
+            <a:ext cx="8102798" cy="281880"/>
           </a:xfrm>
           <a:prstGeom prst="rect">
             <a:avLst/>
@@ -4932,17 +5578,61 @@
           <a:bodyPr wrap="square" lIns="0" tIns="0" rIns="0" bIns="0" rtlCol="0" anchor="t"/>
           <a:lstStyle/>
           <a:p>
-            <a:pPr algn="l" indent="0" marL="0">
-              <a:lnSpc>
-                <a:spcPts val="1680"/>
-              </a:lnSpc>
-              <a:spcBef>
-                <a:spcPts val="300"/>
-              </a:spcBef>
-              <a:spcAft>
-                <a:spcPts val="300"/>
-              </a:spcAft>
-              <a:buNone/>
+            <a:pPr algn="l" marL="342900" indent="-342900">
+              <a:lnSpc>
+                <a:spcPts val="1620"/>
+              </a:lnSpc>
+              <a:spcAft>
+                <a:spcPts val="300"/>
+              </a:spcAft>
+              <a:buSzPct val="100000"/>
+              <a:buChar char="•"/>
+            </a:pPr>
+            <a:r>
+              <a:rPr lang="en-US" sz="1200" b="1" dirty="0">
+                <a:solidFill>
+                  <a:srgbClr val="1C2833"/>
+                </a:solidFill>
+                <a:latin typeface="Arial" pitchFamily="34" charset="0"/>
+                <a:ea typeface="Arial" pitchFamily="34" charset="-122"/>
+                <a:cs typeface="Arial" pitchFamily="34" charset="-120"/>
+              </a:rPr>
+              <a:t>What Ayurveda covers:</a:t>
+            </a:r>
+            <a:endParaRPr lang="en-US" sz="1200" dirty="0"/>
+          </a:p>
+        </p:txBody>
+      </p:sp>
+      <p:sp>
+        <p:nvSpPr>
+          <p:cNvPr id="5" name="Text 3"/>
+          <p:cNvSpPr/>
+          <p:nvPr/>
+        </p:nvSpPr>
+        <p:spPr>
+          <a:xfrm>
+            <a:off x="634901" y="1266974"/>
+            <a:ext cx="8102798" cy="1744563"/>
+          </a:xfrm>
+          <a:prstGeom prst="rect">
+            <a:avLst/>
+          </a:prstGeom>
+          <a:noFill/>
+          <a:ln/>
+        </p:spPr>
+        <p:txBody>
+          <a:bodyPr wrap="square" lIns="0" tIns="0" rIns="0" bIns="0" rtlCol="0" anchor="t"/>
+          <a:lstStyle/>
+          <a:p>
+            <a:pPr algn="l" marL="342900" indent="-342900">
+              <a:lnSpc>
+                <a:spcPts val="1620"/>
+              </a:lnSpc>
+              <a:spcAft>
+                <a:spcPts val="300"/>
+              </a:spcAft>
+              <a:buSzPct val="100000"/>
+              <a:buChar char="•"/>
             </a:pPr>
             <a:r>
               <a:rPr lang="en-US" sz="1200" dirty="0">
@@ -4953,15 +5643,12 @@
                 <a:ea typeface="Arial" pitchFamily="34" charset="-122"/>
                 <a:cs typeface="Arial" pitchFamily="34" charset="-120"/>
               </a:rPr>
-              <a:t>– Preview Day 2: </a:t>
-            </a:r>
-            <a:pPr algn="l" indent="0" marL="0">
-              <a:lnSpc>
-                <a:spcPts val="1680"/>
-              </a:lnSpc>
-              <a:spcBef>
-                <a:spcPts val="300"/>
-              </a:spcBef>
+              <a:t>Daily routine (</a:t>
+            </a:r>
+            <a:pPr algn="l" indent="0" marL="0">
+              <a:lnSpc>
+                <a:spcPts val="1620"/>
+              </a:lnSpc>
               <a:spcAft>
                 <a:spcPts val="300"/>
               </a:spcAft>
@@ -4976,15 +5663,419 @@
                 <a:ea typeface="Arial" pitchFamily="34" charset="-122"/>
                 <a:cs typeface="Arial" pitchFamily="34" charset="-120"/>
               </a:rPr>
-              <a:t>"Tomorrow — the Tridosha. Three biological energies."</a:t>
+              <a:t>dinacharya</a:t>
+            </a:r>
+            <a:pPr algn="l" indent="0" marL="0">
+              <a:lnSpc>
+                <a:spcPts val="1620"/>
+              </a:lnSpc>
+              <a:spcAft>
+                <a:spcPts val="300"/>
+              </a:spcAft>
+              <a:buNone/>
+            </a:pPr>
+            <a:r>
+              <a:rPr lang="en-US" sz="1200" dirty="0">
+                <a:solidFill>
+                  <a:srgbClr val="1C2833"/>
+                </a:solidFill>
+                <a:latin typeface="Arial" pitchFamily="34" charset="0"/>
+                <a:ea typeface="Arial" pitchFamily="34" charset="-122"/>
+                <a:cs typeface="Arial" pitchFamily="34" charset="-120"/>
+              </a:rPr>
+              <a:t>)</a:t>
             </a:r>
             <a:endParaRPr lang="en-US" sz="1200" dirty="0"/>
           </a:p>
-        </p:txBody>
-      </p:sp>
-      <p:sp>
-        <p:nvSpPr>
-          <p:cNvPr id="5" name="Text 3"/>
+          <a:p>
+            <a:pPr algn="l" marL="342900" indent="-342900">
+              <a:lnSpc>
+                <a:spcPts val="1620"/>
+              </a:lnSpc>
+              <a:spcAft>
+                <a:spcPts val="300"/>
+              </a:spcAft>
+              <a:buSzPct val="100000"/>
+              <a:buChar char="•"/>
+            </a:pPr>
+            <a:r>
+              <a:rPr lang="en-US" sz="1200" dirty="0">
+                <a:solidFill>
+                  <a:srgbClr val="1C2833"/>
+                </a:solidFill>
+                <a:latin typeface="Arial" pitchFamily="34" charset="0"/>
+                <a:ea typeface="Arial" pitchFamily="34" charset="-122"/>
+                <a:cs typeface="Arial" pitchFamily="34" charset="-120"/>
+              </a:rPr>
+              <a:t>Seasonal routine (</a:t>
+            </a:r>
+            <a:pPr algn="l" indent="0" marL="0">
+              <a:lnSpc>
+                <a:spcPts val="1620"/>
+              </a:lnSpc>
+              <a:spcAft>
+                <a:spcPts val="300"/>
+              </a:spcAft>
+              <a:buNone/>
+            </a:pPr>
+            <a:r>
+              <a:rPr lang="en-US" sz="1200" i="1" dirty="0">
+                <a:solidFill>
+                  <a:srgbClr val="1C2833"/>
+                </a:solidFill>
+                <a:latin typeface="Arial" pitchFamily="34" charset="0"/>
+                <a:ea typeface="Arial" pitchFamily="34" charset="-122"/>
+                <a:cs typeface="Arial" pitchFamily="34" charset="-120"/>
+              </a:rPr>
+              <a:t>ritucharya</a:t>
+            </a:r>
+            <a:pPr algn="l" indent="0" marL="0">
+              <a:lnSpc>
+                <a:spcPts val="1620"/>
+              </a:lnSpc>
+              <a:spcAft>
+                <a:spcPts val="300"/>
+              </a:spcAft>
+              <a:buNone/>
+            </a:pPr>
+            <a:r>
+              <a:rPr lang="en-US" sz="1200" dirty="0">
+                <a:solidFill>
+                  <a:srgbClr val="1C2833"/>
+                </a:solidFill>
+                <a:latin typeface="Arial" pitchFamily="34" charset="0"/>
+                <a:ea typeface="Arial" pitchFamily="34" charset="-122"/>
+                <a:cs typeface="Arial" pitchFamily="34" charset="-120"/>
+              </a:rPr>
+              <a:t>)</a:t>
+            </a:r>
+            <a:endParaRPr lang="en-US" sz="1200" dirty="0"/>
+          </a:p>
+          <a:p>
+            <a:pPr algn="l" marL="342900" indent="-342900">
+              <a:lnSpc>
+                <a:spcPts val="1620"/>
+              </a:lnSpc>
+              <a:spcAft>
+                <a:spcPts val="300"/>
+              </a:spcAft>
+              <a:buSzPct val="100000"/>
+              <a:buChar char="•"/>
+            </a:pPr>
+            <a:r>
+              <a:rPr lang="en-US" sz="1200" dirty="0">
+                <a:solidFill>
+                  <a:srgbClr val="1C2833"/>
+                </a:solidFill>
+                <a:latin typeface="Arial" pitchFamily="34" charset="0"/>
+                <a:ea typeface="Arial" pitchFamily="34" charset="-122"/>
+                <a:cs typeface="Arial" pitchFamily="34" charset="-120"/>
+              </a:rPr>
+              <a:t>Food (</a:t>
+            </a:r>
+            <a:pPr algn="l" indent="0" marL="0">
+              <a:lnSpc>
+                <a:spcPts val="1620"/>
+              </a:lnSpc>
+              <a:spcAft>
+                <a:spcPts val="300"/>
+              </a:spcAft>
+              <a:buNone/>
+            </a:pPr>
+            <a:r>
+              <a:rPr lang="en-US" sz="1200" i="1" dirty="0">
+                <a:solidFill>
+                  <a:srgbClr val="1C2833"/>
+                </a:solidFill>
+                <a:latin typeface="Arial" pitchFamily="34" charset="0"/>
+                <a:ea typeface="Arial" pitchFamily="34" charset="-122"/>
+                <a:cs typeface="Arial" pitchFamily="34" charset="-120"/>
+              </a:rPr>
+              <a:t>ahāra</a:t>
+            </a:r>
+            <a:pPr algn="l" indent="0" marL="0">
+              <a:lnSpc>
+                <a:spcPts val="1620"/>
+              </a:lnSpc>
+              <a:spcAft>
+                <a:spcPts val="300"/>
+              </a:spcAft>
+              <a:buNone/>
+            </a:pPr>
+            <a:r>
+              <a:rPr lang="en-US" sz="1200" dirty="0">
+                <a:solidFill>
+                  <a:srgbClr val="1C2833"/>
+                </a:solidFill>
+                <a:latin typeface="Arial" pitchFamily="34" charset="0"/>
+                <a:ea typeface="Arial" pitchFamily="34" charset="-122"/>
+                <a:cs typeface="Arial" pitchFamily="34" charset="-120"/>
+              </a:rPr>
+              <a:t>) — what, when, how to eat</a:t>
+            </a:r>
+            <a:endParaRPr lang="en-US" sz="1200" dirty="0"/>
+          </a:p>
+          <a:p>
+            <a:pPr algn="l" marL="342900" indent="-342900">
+              <a:lnSpc>
+                <a:spcPts val="1620"/>
+              </a:lnSpc>
+              <a:spcAft>
+                <a:spcPts val="300"/>
+              </a:spcAft>
+              <a:buSzPct val="100000"/>
+              <a:buChar char="•"/>
+            </a:pPr>
+            <a:r>
+              <a:rPr lang="en-US" sz="1200" dirty="0">
+                <a:solidFill>
+                  <a:srgbClr val="1C2833"/>
+                </a:solidFill>
+                <a:latin typeface="Arial" pitchFamily="34" charset="0"/>
+                <a:ea typeface="Arial" pitchFamily="34" charset="-122"/>
+                <a:cs typeface="Arial" pitchFamily="34" charset="-120"/>
+              </a:rPr>
+              <a:t>Recreation (</a:t>
+            </a:r>
+            <a:pPr algn="l" indent="0" marL="0">
+              <a:lnSpc>
+                <a:spcPts val="1620"/>
+              </a:lnSpc>
+              <a:spcAft>
+                <a:spcPts val="300"/>
+              </a:spcAft>
+              <a:buNone/>
+            </a:pPr>
+            <a:r>
+              <a:rPr lang="en-US" sz="1200" i="1" dirty="0">
+                <a:solidFill>
+                  <a:srgbClr val="1C2833"/>
+                </a:solidFill>
+                <a:latin typeface="Arial" pitchFamily="34" charset="0"/>
+                <a:ea typeface="Arial" pitchFamily="34" charset="-122"/>
+                <a:cs typeface="Arial" pitchFamily="34" charset="-120"/>
+              </a:rPr>
+              <a:t>vihāra</a:t>
+            </a:r>
+            <a:pPr algn="l" indent="0" marL="0">
+              <a:lnSpc>
+                <a:spcPts val="1620"/>
+              </a:lnSpc>
+              <a:spcAft>
+                <a:spcPts val="300"/>
+              </a:spcAft>
+              <a:buNone/>
+            </a:pPr>
+            <a:r>
+              <a:rPr lang="en-US" sz="1200" dirty="0">
+                <a:solidFill>
+                  <a:srgbClr val="1C2833"/>
+                </a:solidFill>
+                <a:latin typeface="Arial" pitchFamily="34" charset="0"/>
+                <a:ea typeface="Arial" pitchFamily="34" charset="-122"/>
+                <a:cs typeface="Arial" pitchFamily="34" charset="-120"/>
+              </a:rPr>
+              <a:t>) — exercise, sleep, social life</a:t>
+            </a:r>
+            <a:endParaRPr lang="en-US" sz="1200" dirty="0"/>
+          </a:p>
+          <a:p>
+            <a:pPr algn="l" marL="342900" indent="-342900">
+              <a:lnSpc>
+                <a:spcPts val="1620"/>
+              </a:lnSpc>
+              <a:spcAft>
+                <a:spcPts val="300"/>
+              </a:spcAft>
+              <a:buSzPct val="100000"/>
+              <a:buChar char="•"/>
+            </a:pPr>
+            <a:r>
+              <a:rPr lang="en-US" sz="1200" dirty="0">
+                <a:solidFill>
+                  <a:srgbClr val="1C2833"/>
+                </a:solidFill>
+                <a:latin typeface="Arial" pitchFamily="34" charset="0"/>
+                <a:ea typeface="Arial" pitchFamily="34" charset="-122"/>
+                <a:cs typeface="Arial" pitchFamily="34" charset="-120"/>
+              </a:rPr>
+              <a:t>Herbal medicines (</a:t>
+            </a:r>
+            <a:pPr algn="l" indent="0" marL="0">
+              <a:lnSpc>
+                <a:spcPts val="1620"/>
+              </a:lnSpc>
+              <a:spcAft>
+                <a:spcPts val="300"/>
+              </a:spcAft>
+              <a:buNone/>
+            </a:pPr>
+            <a:r>
+              <a:rPr lang="en-US" sz="1200" i="1" dirty="0">
+                <a:solidFill>
+                  <a:srgbClr val="1C2833"/>
+                </a:solidFill>
+                <a:latin typeface="Arial" pitchFamily="34" charset="0"/>
+                <a:ea typeface="Arial" pitchFamily="34" charset="-122"/>
+                <a:cs typeface="Arial" pitchFamily="34" charset="-120"/>
+              </a:rPr>
+              <a:t>aushadhi</a:t>
+            </a:r>
+            <a:pPr algn="l" indent="0" marL="0">
+              <a:lnSpc>
+                <a:spcPts val="1620"/>
+              </a:lnSpc>
+              <a:spcAft>
+                <a:spcPts val="300"/>
+              </a:spcAft>
+              <a:buNone/>
+            </a:pPr>
+            <a:r>
+              <a:rPr lang="en-US" sz="1200" dirty="0">
+                <a:solidFill>
+                  <a:srgbClr val="1C2833"/>
+                </a:solidFill>
+                <a:latin typeface="Arial" pitchFamily="34" charset="0"/>
+                <a:ea typeface="Arial" pitchFamily="34" charset="-122"/>
+                <a:cs typeface="Arial" pitchFamily="34" charset="-120"/>
+              </a:rPr>
+              <a:t>)</a:t>
+            </a:r>
+            <a:endParaRPr lang="en-US" sz="1200" dirty="0"/>
+          </a:p>
+          <a:p>
+            <a:pPr algn="l" marL="342900" indent="-342900">
+              <a:lnSpc>
+                <a:spcPts val="1620"/>
+              </a:lnSpc>
+              <a:spcAft>
+                <a:spcPts val="300"/>
+              </a:spcAft>
+              <a:buSzPct val="100000"/>
+              <a:buChar char="•"/>
+            </a:pPr>
+            <a:r>
+              <a:rPr lang="en-US" sz="1200" dirty="0">
+                <a:solidFill>
+                  <a:srgbClr val="1C2833"/>
+                </a:solidFill>
+                <a:latin typeface="Arial" pitchFamily="34" charset="0"/>
+                <a:ea typeface="Arial" pitchFamily="34" charset="-122"/>
+                <a:cs typeface="Arial" pitchFamily="34" charset="-120"/>
+              </a:rPr>
+              <a:t>Surgery (</a:t>
+            </a:r>
+            <a:pPr algn="l" indent="0" marL="0">
+              <a:lnSpc>
+                <a:spcPts val="1620"/>
+              </a:lnSpc>
+              <a:spcAft>
+                <a:spcPts val="300"/>
+              </a:spcAft>
+              <a:buNone/>
+            </a:pPr>
+            <a:r>
+              <a:rPr lang="en-US" sz="1200" i="1" dirty="0">
+                <a:solidFill>
+                  <a:srgbClr val="1C2833"/>
+                </a:solidFill>
+                <a:latin typeface="Arial" pitchFamily="34" charset="0"/>
+                <a:ea typeface="Arial" pitchFamily="34" charset="-122"/>
+                <a:cs typeface="Arial" pitchFamily="34" charset="-120"/>
+              </a:rPr>
+              <a:t>śalya-tantra</a:t>
+            </a:r>
+            <a:pPr algn="l" indent="0" marL="0">
+              <a:lnSpc>
+                <a:spcPts val="1620"/>
+              </a:lnSpc>
+              <a:spcAft>
+                <a:spcPts val="300"/>
+              </a:spcAft>
+              <a:buNone/>
+            </a:pPr>
+            <a:r>
+              <a:rPr lang="en-US" sz="1200" dirty="0">
+                <a:solidFill>
+                  <a:srgbClr val="1C2833"/>
+                </a:solidFill>
+                <a:latin typeface="Arial" pitchFamily="34" charset="0"/>
+                <a:ea typeface="Arial" pitchFamily="34" charset="-122"/>
+                <a:cs typeface="Arial" pitchFamily="34" charset="-120"/>
+              </a:rPr>
+              <a:t>) — historically, e.g. Sushruta</a:t>
+            </a:r>
+            <a:endParaRPr lang="en-US" sz="1200" dirty="0"/>
+          </a:p>
+          <a:p>
+            <a:pPr algn="l" marL="342900" indent="-342900">
+              <a:lnSpc>
+                <a:spcPts val="1620"/>
+              </a:lnSpc>
+              <a:spcAft>
+                <a:spcPts val="300"/>
+              </a:spcAft>
+              <a:buSzPct val="100000"/>
+              <a:buChar char="•"/>
+            </a:pPr>
+            <a:r>
+              <a:rPr lang="en-US" sz="1200" dirty="0">
+                <a:solidFill>
+                  <a:srgbClr val="1C2833"/>
+                </a:solidFill>
+                <a:latin typeface="Arial" pitchFamily="34" charset="0"/>
+                <a:ea typeface="Arial" pitchFamily="34" charset="-122"/>
+                <a:cs typeface="Arial" pitchFamily="34" charset="-120"/>
+              </a:rPr>
+              <a:t>8 branches total (the </a:t>
+            </a:r>
+            <a:pPr algn="l" indent="0" marL="0">
+              <a:lnSpc>
+                <a:spcPts val="1620"/>
+              </a:lnSpc>
+              <a:spcAft>
+                <a:spcPts val="300"/>
+              </a:spcAft>
+              <a:buNone/>
+            </a:pPr>
+            <a:r>
+              <a:rPr lang="en-US" sz="1200" i="1" dirty="0">
+                <a:solidFill>
+                  <a:srgbClr val="1C2833"/>
+                </a:solidFill>
+                <a:latin typeface="Arial" pitchFamily="34" charset="0"/>
+                <a:ea typeface="Arial" pitchFamily="34" charset="-122"/>
+                <a:cs typeface="Arial" pitchFamily="34" charset="-120"/>
+              </a:rPr>
+              <a:t>aṣṭāṅga</a:t>
+            </a:r>
+            <a:pPr algn="l" indent="0" marL="0">
+              <a:lnSpc>
+                <a:spcPts val="1620"/>
+              </a:lnSpc>
+              <a:spcAft>
+                <a:spcPts val="300"/>
+              </a:spcAft>
+              <a:buNone/>
+            </a:pPr>
+            <a:r>
+              <a:rPr lang="en-US" sz="1200" dirty="0">
+                <a:solidFill>
+                  <a:srgbClr val="1C2833"/>
+                </a:solidFill>
+                <a:latin typeface="Arial" pitchFamily="34" charset="0"/>
+                <a:ea typeface="Arial" pitchFamily="34" charset="-122"/>
+                <a:cs typeface="Arial" pitchFamily="34" charset="-120"/>
+              </a:rPr>
+              <a:t> of Ayurveda)</a:t>
+            </a:r>
+            <a:endParaRPr lang="en-US" sz="1200" dirty="0"/>
+          </a:p>
+        </p:txBody>
+      </p:sp>
+      <p:sp>
+        <p:nvSpPr>
+          <p:cNvPr id="6" name="Text 4"/>
           <p:cNvSpPr/>
           <p:nvPr/>
         </p:nvSpPr>
@@ -5134,7 +6225,7 @@
                 <a:ea typeface="Georgia" pitchFamily="34" charset="-122"/>
                 <a:cs typeface="Georgia" pitchFamily="34" charset="-120"/>
               </a:rPr>
-              <a:t>Homework</a:t>
+              <a:t>Core (25 min) (cont.)</a:t>
             </a:r>
             <a:endParaRPr lang="en-US" sz="1800" dirty="0"/>
           </a:p>
@@ -5148,8 +6239,8 @@
         </p:nvSpPr>
         <p:spPr>
           <a:xfrm>
-            <a:off x="406301" y="870942"/>
-            <a:ext cx="8498026" cy="213271"/>
+            <a:off x="634901" y="883593"/>
+            <a:ext cx="8102798" cy="281880"/>
           </a:xfrm>
           <a:prstGeom prst="rect">
             <a:avLst/>
@@ -5161,17 +6252,61 @@
           <a:bodyPr wrap="square" lIns="0" tIns="0" rIns="0" bIns="0" rtlCol="0" anchor="t"/>
           <a:lstStyle/>
           <a:p>
-            <a:pPr algn="l" indent="0" marL="0">
-              <a:lnSpc>
-                <a:spcPts val="1680"/>
-              </a:lnSpc>
-              <a:spcBef>
-                <a:spcPts val="300"/>
-              </a:spcBef>
-              <a:spcAft>
-                <a:spcPts val="300"/>
-              </a:spcAft>
-              <a:buNone/>
+            <a:pPr algn="l" marL="342900" indent="-342900">
+              <a:lnSpc>
+                <a:spcPts val="1620"/>
+              </a:lnSpc>
+              <a:spcAft>
+                <a:spcPts val="300"/>
+              </a:spcAft>
+              <a:buSzPct val="100000"/>
+              <a:buChar char="•"/>
+            </a:pPr>
+            <a:r>
+              <a:rPr lang="en-US" sz="1200" b="1" dirty="0">
+                <a:solidFill>
+                  <a:srgbClr val="1C2833"/>
+                </a:solidFill>
+                <a:latin typeface="Arial" pitchFamily="34" charset="0"/>
+                <a:ea typeface="Arial" pitchFamily="34" charset="-122"/>
+                <a:cs typeface="Arial" pitchFamily="34" charset="-120"/>
+              </a:rPr>
+              <a:t>What Ayurveda does NOT cover well:</a:t>
+            </a:r>
+            <a:endParaRPr lang="en-US" sz="1200" dirty="0"/>
+          </a:p>
+        </p:txBody>
+      </p:sp>
+      <p:sp>
+        <p:nvSpPr>
+          <p:cNvPr id="5" name="Text 3"/>
+          <p:cNvSpPr/>
+          <p:nvPr/>
+        </p:nvSpPr>
+        <p:spPr>
+          <a:xfrm>
+            <a:off x="634901" y="1266974"/>
+            <a:ext cx="8102798" cy="1013222"/>
+          </a:xfrm>
+          <a:prstGeom prst="rect">
+            <a:avLst/>
+          </a:prstGeom>
+          <a:noFill/>
+          <a:ln/>
+        </p:spPr>
+        <p:txBody>
+          <a:bodyPr wrap="square" lIns="0" tIns="0" rIns="0" bIns="0" rtlCol="0" anchor="t"/>
+          <a:lstStyle/>
+          <a:p>
+            <a:pPr algn="l" marL="342900" indent="-342900">
+              <a:lnSpc>
+                <a:spcPts val="1620"/>
+              </a:lnSpc>
+              <a:spcAft>
+                <a:spcPts val="300"/>
+              </a:spcAft>
+              <a:buSzPct val="100000"/>
+              <a:buChar char="•"/>
             </a:pPr>
             <a:r>
               <a:rPr lang="en-US" sz="1200" dirty="0">
@@ -5182,15 +6317,87 @@
                 <a:ea typeface="Arial" pitchFamily="34" charset="-122"/>
                 <a:cs typeface="Arial" pitchFamily="34" charset="-120"/>
               </a:rPr>
-              <a:t>– Notice tonight: what time do you go to sleep? What did you eat for dinner? How did you feel after?</a:t>
+              <a:t>Acute infections requiring antibiotics</a:t>
             </a:r>
             <a:endParaRPr lang="en-US" sz="1200" dirty="0"/>
           </a:p>
-        </p:txBody>
-      </p:sp>
-      <p:sp>
-        <p:nvSpPr>
-          <p:cNvPr id="5" name="Text 3"/>
+          <a:p>
+            <a:pPr algn="l" marL="342900" indent="-342900">
+              <a:lnSpc>
+                <a:spcPts val="1620"/>
+              </a:lnSpc>
+              <a:spcAft>
+                <a:spcPts val="300"/>
+              </a:spcAft>
+              <a:buSzPct val="100000"/>
+              <a:buChar char="•"/>
+            </a:pPr>
+            <a:r>
+              <a:rPr lang="en-US" sz="1200" dirty="0">
+                <a:solidFill>
+                  <a:srgbClr val="1C2833"/>
+                </a:solidFill>
+                <a:latin typeface="Arial" pitchFamily="34" charset="0"/>
+                <a:ea typeface="Arial" pitchFamily="34" charset="-122"/>
+                <a:cs typeface="Arial" pitchFamily="34" charset="-120"/>
+              </a:rPr>
+              <a:t>Emergency surgery</a:t>
+            </a:r>
+            <a:endParaRPr lang="en-US" sz="1200" dirty="0"/>
+          </a:p>
+          <a:p>
+            <a:pPr algn="l" marL="342900" indent="-342900">
+              <a:lnSpc>
+                <a:spcPts val="1620"/>
+              </a:lnSpc>
+              <a:spcAft>
+                <a:spcPts val="300"/>
+              </a:spcAft>
+              <a:buSzPct val="100000"/>
+              <a:buChar char="•"/>
+            </a:pPr>
+            <a:r>
+              <a:rPr lang="en-US" sz="1200" dirty="0">
+                <a:solidFill>
+                  <a:srgbClr val="1C2833"/>
+                </a:solidFill>
+                <a:latin typeface="Arial" pitchFamily="34" charset="0"/>
+                <a:ea typeface="Arial" pitchFamily="34" charset="-122"/>
+                <a:cs typeface="Arial" pitchFamily="34" charset="-120"/>
+              </a:rPr>
+              <a:t>Genetic conditions requiring modern diagnostics</a:t>
+            </a:r>
+            <a:endParaRPr lang="en-US" sz="1200" dirty="0"/>
+          </a:p>
+          <a:p>
+            <a:pPr algn="l" marL="342900" indent="-342900">
+              <a:lnSpc>
+                <a:spcPts val="1620"/>
+              </a:lnSpc>
+              <a:spcAft>
+                <a:spcPts val="300"/>
+              </a:spcAft>
+              <a:buSzPct val="100000"/>
+              <a:buChar char="•"/>
+            </a:pPr>
+            <a:r>
+              <a:rPr lang="en-US" sz="1200" dirty="0">
+                <a:solidFill>
+                  <a:srgbClr val="1C2833"/>
+                </a:solidFill>
+                <a:latin typeface="Arial" pitchFamily="34" charset="0"/>
+                <a:ea typeface="Arial" pitchFamily="34" charset="-122"/>
+                <a:cs typeface="Arial" pitchFamily="34" charset="-120"/>
+              </a:rPr>
+              <a:t>Mental health requiring specialised psychiatric care</a:t>
+            </a:r>
+            <a:endParaRPr lang="en-US" sz="1200" dirty="0"/>
+          </a:p>
+        </p:txBody>
+      </p:sp>
+      <p:sp>
+        <p:nvSpPr>
+          <p:cNvPr id="6" name="Text 4"/>
           <p:cNvSpPr/>
           <p:nvPr/>
         </p:nvSpPr>
@@ -5340,7 +6547,7 @@
                 <a:ea typeface="Georgia" pitchFamily="34" charset="-122"/>
                 <a:cs typeface="Georgia" pitchFamily="34" charset="-120"/>
               </a:rPr>
-              <a:t>Differentiation</a:t>
+              <a:t>Core (25 min) (cont.)</a:t>
             </a:r>
             <a:endParaRPr lang="en-US" sz="1800" dirty="0"/>
           </a:p>
@@ -5355,7 +6562,7 @@
         <p:spPr>
           <a:xfrm>
             <a:off x="634901" y="883593"/>
-            <a:ext cx="8102798" cy="525661"/>
+            <a:ext cx="8102798" cy="487561"/>
           </a:xfrm>
           <a:prstGeom prst="rect">
             <a:avLst/>
@@ -5386,7 +6593,7 @@
                 <a:ea typeface="Arial" pitchFamily="34" charset="-122"/>
                 <a:cs typeface="Arial" pitchFamily="34" charset="-120"/>
               </a:rPr>
-              <a:t>Tier up:</a:t>
+              <a:t>The honest framing:</a:t>
             </a:r>
             <a:pPr algn="l" indent="0" marL="0">
               <a:lnSpc>
@@ -5406,31 +6613,27 @@
                 <a:ea typeface="Arial" pitchFamily="34" charset="-122"/>
                 <a:cs typeface="Arial" pitchFamily="34" charset="-120"/>
               </a:rPr>
-              <a:t> Read Wujastyk's intro chapter.</a:t>
-            </a:r>
-            <a:endParaRPr lang="en-US" sz="1200" dirty="0"/>
-          </a:p>
-          <a:p>
-            <a:pPr algn="l" marL="342900" indent="-342900">
+              <a:t> Ayurveda + modern medicine are </a:t>
+            </a:r>
+            <a:pPr algn="l" indent="0" marL="0">
               <a:lnSpc>
                 <a:spcPts val="1620"/>
               </a:lnSpc>
               <a:spcAft>
                 <a:spcPts val="300"/>
               </a:spcAft>
-              <a:buSzPct val="100000"/>
-              <a:buChar char="•"/>
-            </a:pPr>
-            <a:r>
-              <a:rPr lang="en-US" sz="1200" b="1" dirty="0">
-                <a:solidFill>
-                  <a:srgbClr val="1C2833"/>
-                </a:solidFill>
-                <a:latin typeface="Arial" pitchFamily="34" charset="0"/>
-                <a:ea typeface="Arial" pitchFamily="34" charset="-122"/>
-                <a:cs typeface="Arial" pitchFamily="34" charset="-120"/>
-              </a:rPr>
-              <a:t>Tier down:</a:t>
+              <a:buNone/>
+            </a:pPr>
+            <a:r>
+              <a:rPr lang="en-US" sz="1200" i="1" dirty="0">
+                <a:solidFill>
+                  <a:srgbClr val="1C2833"/>
+                </a:solidFill>
+                <a:latin typeface="Arial" pitchFamily="34" charset="0"/>
+                <a:ea typeface="Arial" pitchFamily="34" charset="-122"/>
+                <a:cs typeface="Arial" pitchFamily="34" charset="-120"/>
+              </a:rPr>
+              <a:t>partners</a:t>
             </a:r>
             <a:pPr algn="l" indent="0" marL="0">
               <a:lnSpc>
@@ -5450,87 +6653,7 @@
                 <a:ea typeface="Arial" pitchFamily="34" charset="-122"/>
                 <a:cs typeface="Arial" pitchFamily="34" charset="-120"/>
               </a:rPr>
-              <a:t> Just memorise </a:t>
-            </a:r>
-            <a:pPr algn="l" indent="0" marL="0">
-              <a:lnSpc>
-                <a:spcPts val="1620"/>
-              </a:lnSpc>
-              <a:spcAft>
-                <a:spcPts val="300"/>
-              </a:spcAft>
-              <a:buNone/>
-            </a:pPr>
-            <a:r>
-              <a:rPr lang="en-US" sz="1200" i="1" dirty="0">
-                <a:solidFill>
-                  <a:srgbClr val="1C2833"/>
-                </a:solidFill>
-                <a:latin typeface="Arial" pitchFamily="34" charset="0"/>
-                <a:ea typeface="Arial" pitchFamily="34" charset="-122"/>
-                <a:cs typeface="Arial" pitchFamily="34" charset="-120"/>
-              </a:rPr>
-              <a:t>Āyurveda</a:t>
-            </a:r>
-            <a:pPr algn="l" indent="0" marL="0">
-              <a:lnSpc>
-                <a:spcPts val="1620"/>
-              </a:lnSpc>
-              <a:spcAft>
-                <a:spcPts val="300"/>
-              </a:spcAft>
-              <a:buNone/>
-            </a:pPr>
-            <a:r>
-              <a:rPr lang="en-US" sz="1200" dirty="0">
-                <a:solidFill>
-                  <a:srgbClr val="1C2833"/>
-                </a:solidFill>
-                <a:latin typeface="Arial" pitchFamily="34" charset="0"/>
-                <a:ea typeface="Arial" pitchFamily="34" charset="-122"/>
-                <a:cs typeface="Arial" pitchFamily="34" charset="-120"/>
-              </a:rPr>
-              <a:t> (science of life) and </a:t>
-            </a:r>
-            <a:pPr algn="l" indent="0" marL="0">
-              <a:lnSpc>
-                <a:spcPts val="1620"/>
-              </a:lnSpc>
-              <a:spcAft>
-                <a:spcPts val="300"/>
-              </a:spcAft>
-              <a:buNone/>
-            </a:pPr>
-            <a:r>
-              <a:rPr lang="en-US" sz="1200" i="1" dirty="0">
-                <a:solidFill>
-                  <a:srgbClr val="1C2833"/>
-                </a:solidFill>
-                <a:latin typeface="Arial" pitchFamily="34" charset="0"/>
-                <a:ea typeface="Arial" pitchFamily="34" charset="-122"/>
-                <a:cs typeface="Arial" pitchFamily="34" charset="-120"/>
-              </a:rPr>
-              <a:t>Swasthya</a:t>
-            </a:r>
-            <a:pPr algn="l" indent="0" marL="0">
-              <a:lnSpc>
-                <a:spcPts val="1620"/>
-              </a:lnSpc>
-              <a:spcAft>
-                <a:spcPts val="300"/>
-              </a:spcAft>
-              <a:buNone/>
-            </a:pPr>
-            <a:r>
-              <a:rPr lang="en-US" sz="1200" dirty="0">
-                <a:solidFill>
-                  <a:srgbClr val="1C2833"/>
-                </a:solidFill>
-                <a:latin typeface="Arial" pitchFamily="34" charset="0"/>
-                <a:ea typeface="Arial" pitchFamily="34" charset="-122"/>
-                <a:cs typeface="Arial" pitchFamily="34" charset="-120"/>
-              </a:rPr>
-              <a:t> (wellbeing).</a:t>
+              <a:t>, not rivals. Each has a domain. Don't substitute one for the other.</a:t>
             </a:r>
             <a:endParaRPr lang="en-US" sz="1200" dirty="0"/>
           </a:p>
